--- a/Topic_B/Exam_Practice/TB-L02_Speaking_Workshop_Family_Friends_and_Relationships.pptx
+++ b/Topic_B/Exam_Practice/TB-L02_Speaking_Workshop_Family_Friends_and_Relationships.pptx
@@ -615,7 +615,11 @@
           <a:lstStyle/>
           <a:p>
             <a:r>
-              <a:rPr lang="en-US" dirty="0"/>
+              <a:rPr lang="ar-SA" dirty="0">
+                <a:latin typeface="Amiri" pitchFamily="2" charset="-78"/>
+                <a:ea typeface="Amiri" pitchFamily="2" charset="-78"/>
+                <a:cs typeface="Amiri" pitchFamily="2" charset="-78"/>
+              </a:rPr>
               <a:t>ROLE PLAY C (Develop) — a friend’s problem.
 SET-UP IN THE BREAKOUT ROOM: A = examiner (reads the left column ONLY — the questions, in order), B = candidate (sees the task column; Core may use the help column), C = observer (ticks the feedback checklist). 1 minute preparation, about 3 minutes speaking, 1 minute feedback, then rotate.
 Task ! is the unexpected question: in the exam the candidate has not seen it — the examiner should read it without warning.
@@ -707,7 +711,11 @@
           <a:lstStyle/>
           <a:p>
             <a:r>
-              <a:rPr lang="en-US" dirty="0"/>
+              <a:rPr lang="ar-SA" dirty="0">
+                <a:latin typeface="Amiri" pitchFamily="2" charset="-78"/>
+                <a:ea typeface="Amiri" pitchFamily="2" charset="-78"/>
+                <a:cs typeface="Amiri" pitchFamily="2" charset="-78"/>
+              </a:rPr>
               <a:t>ROLE PLAY D (Stretch) — a podcast on families.
 SET-UP IN THE BREAKOUT ROOM: A = examiner (reads the left column ONLY — the questions, in order), B = candidate (sees the task column; Core may use the help column), C = observer (ticks the feedback checklist). 1 minute preparation, about 3 minutes speaking, 1 minute feedback, then rotate.
 Task ! is the unexpected question: in the exam the candidate has not seen it — the examiner should read it without warning.
@@ -1243,7 +1251,11 @@
           <a:lstStyle/>
           <a:p>
             <a:r>
-              <a:rPr lang="en-US" dirty="0"/>
+              <a:rPr lang="ar-SA" dirty="0">
+                <a:latin typeface="Amiri" pitchFamily="2" charset="-78"/>
+                <a:ea typeface="Amiri" pitchFamily="2" charset="-78"/>
+                <a:cs typeface="Amiri" pitchFamily="2" charset="-78"/>
+              </a:rPr>
               <a:t>TOPIC CONVERSATION — Core. Examiner asks the questions in order and may add “لِمَاذَا؟ / هَلْ يُمْكِنُ أَنْ تَشْرَحَ أَكْثَرَ؟” to push for more. Candidate aims for one full sentence per question.
 </a:t>
             </a:r>
@@ -1332,7 +1344,11 @@
           <a:lstStyle/>
           <a:p>
             <a:r>
-              <a:rPr lang="en-US" dirty="0"/>
+              <a:rPr lang="ar-SA" dirty="0">
+                <a:latin typeface="Amiri" pitchFamily="2" charset="-78"/>
+                <a:ea typeface="Amiri" pitchFamily="2" charset="-78"/>
+                <a:cs typeface="Amiri" pitchFamily="2" charset="-78"/>
+              </a:rPr>
               <a:t>TOPIC CONVERSATION — Develop. Examiner asks the questions in order and may add “لِمَاذَا؟ / هَلْ يُمْكِنُ أَنْ تَشْرَحَ أَكْثَرَ؟” to push for more. Candidate aims for two or three sentences, with a reason or a past detail.
 </a:t>
             </a:r>
@@ -1421,7 +1437,11 @@
           <a:lstStyle/>
           <a:p>
             <a:r>
-              <a:rPr lang="en-US" dirty="0"/>
+              <a:rPr lang="ar-SA" dirty="0">
+                <a:latin typeface="Amiri" pitchFamily="2" charset="-78"/>
+                <a:ea typeface="Amiri" pitchFamily="2" charset="-78"/>
+                <a:cs typeface="Amiri" pitchFamily="2" charset="-78"/>
+              </a:rPr>
               <a:t>TOPIC CONVERSATION — Stretch. Examiner asks the questions in order and may add “لِمَاذَا؟ / هَلْ يُمْكِنُ أَنْ تَشْرَحَ أَكْثَرَ؟” to push for more. Candidate aims for a developed answer: opinion, comparison, concession and a conditional.
 </a:t>
             </a:r>
@@ -1510,7 +1530,11 @@
           <a:lstStyle/>
           <a:p>
             <a:r>
-              <a:rPr lang="en-US" dirty="0"/>
+              <a:rPr lang="ar-SA" dirty="0">
+                <a:latin typeface="Amiri" pitchFamily="2" charset="-78"/>
+                <a:ea typeface="Amiri" pitchFamily="2" charset="-78"/>
+                <a:cs typeface="Amiri" pitchFamily="2" charset="-78"/>
+              </a:rPr>
               <a:t>WELCOME (1 min) — while students join.
 • Greet each student by name as they arrive: السَّلَامُ عَلَيْكُمْ. Take the register (Pastoral Tracker: attendance 0/1).
 • 2-MINUTE CHECK-IN (SEND training): a private chat to any student who seemed unsettled last lesson — “Are you okay today? 👍 / 👎”.
@@ -2224,7 +2248,11 @@
           <a:lstStyle/>
           <a:p>
             <a:r>
-              <a:rPr lang="en-US" dirty="0"/>
+              <a:rPr lang="ar-SA" dirty="0">
+                <a:latin typeface="Amiri" pitchFamily="2" charset="-78"/>
+                <a:ea typeface="Amiri" pitchFamily="2" charset="-78"/>
+                <a:cs typeface="Amiri" pitchFamily="2" charset="-78"/>
+              </a:rPr>
               <a:t>TEACH (3 min). Role play = precise and complete; conversation = develop. Choral repetition of the repair phrases. To a girl: تُعِيدِي.</a:t>
             </a:r>
             <a:endParaRPr lang="en-US" dirty="0"/>
@@ -2312,7 +2340,11 @@
           <a:lstStyle/>
           <a:p>
             <a:r>
-              <a:rPr lang="en-US" dirty="0"/>
+              <a:rPr lang="ar-SA" dirty="0">
+                <a:latin typeface="Amiri" pitchFamily="2" charset="-78"/>
+                <a:ea typeface="Amiri" pitchFamily="2" charset="-78"/>
+                <a:cs typeface="Amiri" pitchFamily="2" charset="-78"/>
+              </a:rPr>
               <a:t>LANGUAGE BANK (2 min) — the dual: عِنْدِي أَخَوَانِ وَأُخْتَانِ (two brothers and two sisters). Iḍāfa: ابْنُ عَمِّي (my uncle’s son) — the first word loses al- and tanwīn.</a:t>
             </a:r>
             <a:endParaRPr lang="en-US" dirty="0"/>
@@ -2400,7 +2432,11 @@
           <a:lstStyle/>
           <a:p>
             <a:r>
-              <a:rPr lang="en-US" dirty="0"/>
+              <a:rPr lang="ar-SA" dirty="0">
+                <a:latin typeface="Amiri" pitchFamily="2" charset="-78"/>
+                <a:ea typeface="Amiri" pitchFamily="2" charset="-78"/>
+                <a:cs typeface="Amiri" pitchFamily="2" charset="-78"/>
+              </a:rPr>
               <a:t>LANGUAGE BANK (2 min) — أَتَّفِقُ مَعَ أُخْتِي (I get on with my sister) · أَتَشَاجَرُ مَعَ أَخِي أَحْيَانًا. Superlatives: أَخِي الأَكْبَرُ · أُخْتِي الكُبْرَى.</a:t>
             </a:r>
             <a:endParaRPr lang="en-US" dirty="0"/>
@@ -2576,7 +2612,11 @@
           <a:lstStyle/>
           <a:p>
             <a:r>
-              <a:rPr lang="en-US" dirty="0"/>
+              <a:rPr lang="ar-SA" dirty="0">
+                <a:latin typeface="Amiri" pitchFamily="2" charset="-78"/>
+                <a:ea typeface="Amiri" pitchFamily="2" charset="-78"/>
+                <a:cs typeface="Amiri" pitchFamily="2" charset="-78"/>
+              </a:rPr>
               <a:t>ROLE PLAY A (Core) — showing a photo.
 SET-UP IN THE BREAKOUT ROOM: A = examiner (reads the left column ONLY — the questions, in order), B = candidate (sees the task column; Core may use the help column), C = observer (ticks the feedback checklist). 1 minute preparation, about 3 minutes speaking, 1 minute feedback, then rotate.
 Task ! is the unexpected question: in the exam the candidate has not seen it — the examiner should read it without warning.
@@ -2668,7 +2708,11 @@
           <a:lstStyle/>
           <a:p>
             <a:r>
-              <a:rPr lang="en-US" dirty="0"/>
+              <a:rPr lang="ar-SA" dirty="0">
+                <a:latin typeface="Amiri" pitchFamily="2" charset="-78"/>
+                <a:ea typeface="Amiri" pitchFamily="2" charset="-78"/>
+                <a:cs typeface="Amiri" pitchFamily="2" charset="-78"/>
+              </a:rPr>
               <a:t>ROLE PLAY B (Core+) — planning a family visit.
 SET-UP IN THE BREAKOUT ROOM: A = examiner (reads the left column ONLY — the questions, in order), B = candidate (sees the task column; Core may use the help column), C = observer (ticks the feedback checklist). 1 minute preparation, about 3 minutes speaking, 1 minute feedback, then rotate.
 Task ! is the unexpected question: in the exam the candidate has not seen it — the examiner should read it without warning.
@@ -3156,6 +3200,7 @@
                   <a:srgbClr val="D4AF37"/>
                 </a:solidFill>
                 <a:latin typeface="Amiri" pitchFamily="2" charset="-78"/>
+                <a:ea typeface="Amiri" pitchFamily="2" charset="-78"/>
                 <a:cs typeface="Amiri" pitchFamily="2" charset="-78"/>
               </a:rPr>
               <a:t>م</a:t>
@@ -3362,6 +3407,7 @@
                   <a:srgbClr val="D4AF37"/>
                 </a:solidFill>
                 <a:latin typeface="Amiri" pitchFamily="2" charset="-78"/>
+                <a:ea typeface="Amiri" pitchFamily="2" charset="-78"/>
                 <a:cs typeface="Amiri" pitchFamily="2" charset="-78"/>
               </a:rPr>
               <a:t>وَرْشَةُ التَّحَدُّثِ — العَائِلَةُ وَالأَصْدِقَاءُ</a:t>
@@ -3819,6 +3865,7 @@
                   <a:srgbClr val="D4AF37"/>
                 </a:solidFill>
                 <a:latin typeface="Amiri" pitchFamily="2" charset="-78"/>
+                <a:ea typeface="Amiri" pitchFamily="2" charset="-78"/>
                 <a:cs typeface="Amiri" pitchFamily="2" charset="-78"/>
               </a:rPr>
               <a:t>م</a:t>
@@ -4139,6 +4186,7 @@
                   <a:srgbClr val="8A6D1E"/>
                 </a:solidFill>
                 <a:latin typeface="Amiri" pitchFamily="2" charset="-78"/>
+                <a:ea typeface="Amiri" pitchFamily="2" charset="-78"/>
                 <a:cs typeface="Amiri" pitchFamily="2" charset="-78"/>
               </a:rPr>
               <a:t>مُشْكِلَةٌ عَائِلِيَّةٌ</a:t>
@@ -4419,6 +4467,7 @@
                   <a:srgbClr val="1B3B6F"/>
                 </a:solidFill>
                 <a:latin typeface="Amiri" pitchFamily="2" charset="-78"/>
+                <a:ea typeface="Amiri" pitchFamily="2" charset="-78"/>
                 <a:cs typeface="Amiri" pitchFamily="2" charset="-78"/>
               </a:rPr>
               <a:t>لَا تَحْزَنِي! مَاذَا …؟</a:t>
@@ -4495,6 +4544,7 @@
                   <a:srgbClr val="1B3B6F"/>
                 </a:solidFill>
                 <a:latin typeface="Amiri" pitchFamily="2" charset="-78"/>
+                <a:ea typeface="Amiri" pitchFamily="2" charset="-78"/>
                 <a:cs typeface="Amiri" pitchFamily="2" charset="-78"/>
               </a:rPr>
               <a:t>تَشَاجَرْتُ مَعَ أُخْتِي أَمْسِ.</a:t>
@@ -4598,6 +4648,7 @@
                   <a:srgbClr val="1B3B6F"/>
                 </a:solidFill>
                 <a:latin typeface="Amiri" pitchFamily="2" charset="-78"/>
+                <a:ea typeface="Amiri" pitchFamily="2" charset="-78"/>
                 <a:cs typeface="Amiri" pitchFamily="2" charset="-78"/>
               </a:rPr>
               <a:t>أَنَا أَيْضًا … أَحْيَانًا</a:t>
@@ -4674,6 +4725,7 @@
                   <a:srgbClr val="1B3B6F"/>
                 </a:solidFill>
                 <a:latin typeface="Amiri" pitchFamily="2" charset="-78"/>
+                <a:ea typeface="Amiri" pitchFamily="2" charset="-78"/>
                 <a:cs typeface="Amiri" pitchFamily="2" charset="-78"/>
               </a:rPr>
               <a:t>أَخَذَتْ مَلَابِسِي بِدُونِ إِذْنٍ.</a:t>
@@ -4777,6 +4829,7 @@
                   <a:srgbClr val="1B3B6F"/>
                 </a:solidFill>
                 <a:latin typeface="Amiri" pitchFamily="2" charset="-78"/>
+                <a:ea typeface="Amiri" pitchFamily="2" charset="-78"/>
                 <a:cs typeface="Amiri" pitchFamily="2" charset="-78"/>
               </a:rPr>
               <a:t>يَجِبُ أَنْ … وَأَنْ …</a:t>
@@ -4853,6 +4906,7 @@
                   <a:srgbClr val="1B3B6F"/>
                 </a:solidFill>
                 <a:latin typeface="Amiri" pitchFamily="2" charset="-78"/>
+                <a:ea typeface="Amiri" pitchFamily="2" charset="-78"/>
                 <a:cs typeface="Amiri" pitchFamily="2" charset="-78"/>
               </a:rPr>
               <a:t>مَاذَا أَفْعَلُ الآنَ؟</a:t>
@@ -4956,6 +5010,7 @@
                   <a:srgbClr val="1B3B6F"/>
                 </a:solidFill>
                 <a:latin typeface="Amiri" pitchFamily="2" charset="-78"/>
+                <a:ea typeface="Amiri" pitchFamily="2" charset="-78"/>
                 <a:cs typeface="Amiri" pitchFamily="2" charset="-78"/>
               </a:rPr>
               <a:t>لِمَاذَا لَا تَطْلُبِينَ مِنْ …؟</a:t>
@@ -5032,6 +5087,7 @@
                   <a:srgbClr val="1B3B6F"/>
                 </a:solidFill>
                 <a:latin typeface="Amiri" pitchFamily="2" charset="-78"/>
+                <a:ea typeface="Amiri" pitchFamily="2" charset="-78"/>
                 <a:cs typeface="Amiri" pitchFamily="2" charset="-78"/>
               </a:rPr>
               <a:t>… لٰكِنَّهَا أَكْبَرُ مِنِّي، وَلَا تَسْمَعُنِي!</a:t>
@@ -5135,6 +5191,7 @@
                   <a:srgbClr val="1B3B6F"/>
                 </a:solidFill>
                 <a:latin typeface="Amiri" pitchFamily="2" charset="-78"/>
+                <a:ea typeface="Amiri" pitchFamily="2" charset="-78"/>
                 <a:cs typeface="Amiri" pitchFamily="2" charset="-78"/>
               </a:rPr>
               <a:t>كُنَّا … أَمَّا الآنَ …</a:t>
@@ -5211,6 +5268,7 @@
                   <a:srgbClr val="1B3B6F"/>
                 </a:solidFill>
                 <a:latin typeface="Amiri" pitchFamily="2" charset="-78"/>
+                <a:ea typeface="Amiri" pitchFamily="2" charset="-78"/>
                 <a:cs typeface="Amiri" pitchFamily="2" charset="-78"/>
               </a:rPr>
               <a:t>هَلْ أَنْتِ قَرِيبَةٌ مِنْ أَخِيكِ؟</a:t>
@@ -5420,6 +5478,7 @@
                   <a:srgbClr val="D4AF37"/>
                 </a:solidFill>
                 <a:latin typeface="Amiri" pitchFamily="2" charset="-78"/>
+                <a:ea typeface="Amiri" pitchFamily="2" charset="-78"/>
                 <a:cs typeface="Amiri" pitchFamily="2" charset="-78"/>
               </a:rPr>
               <a:t>م</a:t>
@@ -5740,6 +5799,7 @@
                   <a:srgbClr val="8A6D1E"/>
                 </a:solidFill>
                 <a:latin typeface="Amiri" pitchFamily="2" charset="-78"/>
+                <a:ea typeface="Amiri" pitchFamily="2" charset="-78"/>
                 <a:cs typeface="Amiri" pitchFamily="2" charset="-78"/>
               </a:rPr>
               <a:t>الأُسْرَةُ اليَوْمَ</a:t>
@@ -6020,6 +6080,7 @@
                   <a:srgbClr val="1B3B6F"/>
                 </a:solidFill>
                 <a:latin typeface="Amiri" pitchFamily="2" charset="-78"/>
+                <a:ea typeface="Amiri" pitchFamily="2" charset="-78"/>
                 <a:cs typeface="Amiri" pitchFamily="2" charset="-78"/>
               </a:rPr>
               <a:t>كَانَتِ الأُسَرُ … أَمَّا اليَوْمَ فَيَسْكُنُ …</a:t>
@@ -6096,6 +6157,7 @@
                   <a:srgbClr val="1B3B6F"/>
                 </a:solidFill>
                 <a:latin typeface="Amiri" pitchFamily="2" charset="-78"/>
+                <a:ea typeface="Amiri" pitchFamily="2" charset="-78"/>
                 <a:cs typeface="Amiri" pitchFamily="2" charset="-78"/>
               </a:rPr>
               <a:t>هَلْ تَغَيَّرَتِ الأُسْرَةُ عَنْ أَيَّامِ أَجْدَادِكَ؟</a:t>
@@ -6199,6 +6261,7 @@
                   <a:srgbClr val="1B3B6F"/>
                 </a:solidFill>
                 <a:latin typeface="Amiri" pitchFamily="2" charset="-78"/>
+                <a:ea typeface="Amiri" pitchFamily="2" charset="-78"/>
                 <a:cs typeface="Amiri" pitchFamily="2" charset="-78"/>
               </a:rPr>
               <a:t>جَدَّتِي … فَتَعَلَّمْتُ مِنْهَا …</a:t>
@@ -6275,6 +6338,7 @@
                   <a:srgbClr val="1B3B6F"/>
                 </a:solidFill>
                 <a:latin typeface="Amiri" pitchFamily="2" charset="-78"/>
+                <a:ea typeface="Amiri" pitchFamily="2" charset="-78"/>
                 <a:cs typeface="Amiri" pitchFamily="2" charset="-78"/>
               </a:rPr>
               <a:t>مَا دَوْرُ الأَجْدَادِ فِي حَيَاتِكَ؟</a:t>
@@ -6378,6 +6442,7 @@
                   <a:srgbClr val="1B3B6F"/>
                 </a:solidFill>
                 <a:latin typeface="Amiri" pitchFamily="2" charset="-78"/>
+                <a:ea typeface="Amiri" pitchFamily="2" charset="-78"/>
                 <a:cs typeface="Amiri" pitchFamily="2" charset="-78"/>
               </a:rPr>
               <a:t>صَحِيحٌ أَنَّ … غَيْرَ أَنَّ …</a:t>
@@ -6454,6 +6519,7 @@
                   <a:srgbClr val="1B3B6F"/>
                 </a:solidFill>
                 <a:latin typeface="Amiri" pitchFamily="2" charset="-78"/>
+                <a:ea typeface="Amiri" pitchFamily="2" charset="-78"/>
                 <a:cs typeface="Amiri" pitchFamily="2" charset="-78"/>
               </a:rPr>
               <a:t>هَلِ الأَصْدِقَاءُ أَهَمُّ مِنَ العَائِلَةِ لِلْمُرَاهِقِينَ؟</a:t>
@@ -6557,6 +6623,7 @@
                   <a:srgbClr val="1B3B6F"/>
                 </a:solidFill>
                 <a:latin typeface="Amiri" pitchFamily="2" charset="-78"/>
+                <a:ea typeface="Amiri" pitchFamily="2" charset="-78"/>
                 <a:cs typeface="Amiri" pitchFamily="2" charset="-78"/>
               </a:rPr>
               <a:t>تَجْعَلُنَا … فَمَثَلًا …</a:t>
@@ -6633,6 +6700,7 @@
                   <a:srgbClr val="1B3B6F"/>
                 </a:solidFill>
                 <a:latin typeface="Amiri" pitchFamily="2" charset="-78"/>
+                <a:ea typeface="Amiri" pitchFamily="2" charset="-78"/>
                 <a:cs typeface="Amiri" pitchFamily="2" charset="-78"/>
               </a:rPr>
               <a:t>كَيْفَ تُؤَثِّرُ الهَوَاتِفُ فِي العَلَاقَاتِ العَائِلِيَّةِ؟</a:t>
@@ -6736,6 +6804,7 @@
                   <a:srgbClr val="1B3B6F"/>
                 </a:solidFill>
                 <a:latin typeface="Amiri" pitchFamily="2" charset="-78"/>
+                <a:ea typeface="Amiri" pitchFamily="2" charset="-78"/>
                 <a:cs typeface="Amiri" pitchFamily="2" charset="-78"/>
               </a:rPr>
               <a:t>لَوْ وَضَعْتُ قَاعِدَةً، لَمَنَعْتُ …</a:t>
@@ -6812,6 +6881,7 @@
                   <a:srgbClr val="1B3B6F"/>
                 </a:solidFill>
                 <a:latin typeface="Amiri" pitchFamily="2" charset="-78"/>
+                <a:ea typeface="Amiri" pitchFamily="2" charset="-78"/>
                 <a:cs typeface="Amiri" pitchFamily="2" charset="-78"/>
               </a:rPr>
               <a:t>لَوْ وَضَعْتَ قَاعِدَةً وَاحِدَةً لِأُسْرَتِكَ، فَمَاذَا تَكُونُ؟</a:t>
@@ -7021,6 +7091,7 @@
                   <a:srgbClr val="D4AF37"/>
                 </a:solidFill>
                 <a:latin typeface="Amiri" pitchFamily="2" charset="-78"/>
+                <a:ea typeface="Amiri" pitchFamily="2" charset="-78"/>
                 <a:cs typeface="Amiri" pitchFamily="2" charset="-78"/>
               </a:rPr>
               <a:t>م</a:t>
@@ -7341,6 +7412,7 @@
                   <a:srgbClr val="8A6D1E"/>
                 </a:solidFill>
                 <a:latin typeface="Amiri" pitchFamily="2" charset="-78"/>
+                <a:ea typeface="Amiri" pitchFamily="2" charset="-78"/>
                 <a:cs typeface="Amiri" pitchFamily="2" charset="-78"/>
               </a:rPr>
               <a:t>وَرَقَةُ المُلَاحِظِ</a:t>
@@ -8811,6 +8883,7 @@
                   <a:srgbClr val="D4AF37"/>
                 </a:solidFill>
                 <a:latin typeface="Amiri" pitchFamily="2" charset="-78"/>
+                <a:ea typeface="Amiri" pitchFamily="2" charset="-78"/>
                 <a:cs typeface="Amiri" pitchFamily="2" charset="-78"/>
               </a:rPr>
               <a:t>م</a:t>
@@ -9131,6 +9204,7 @@
                   <a:srgbClr val="8A6D1E"/>
                 </a:solidFill>
                 <a:latin typeface="Amiri" pitchFamily="2" charset="-78"/>
+                <a:ea typeface="Amiri" pitchFamily="2" charset="-78"/>
                 <a:cs typeface="Amiri" pitchFamily="2" charset="-78"/>
               </a:rPr>
               <a:t>نَمُوذَجُ الإِجَابَةِ</a:t>
@@ -9373,6 +9447,7 @@
                   <a:srgbClr val="1B3B6F"/>
                 </a:solidFill>
                 <a:latin typeface="Amiri" pitchFamily="2" charset="-78"/>
+                <a:ea typeface="Amiri" pitchFamily="2" charset="-78"/>
                 <a:cs typeface="Amiri" pitchFamily="2" charset="-78"/>
               </a:rPr>
               <a:t>فِي أُسْرَتِي خَمْسَةُ أَشْخَاصٍ: أَبِي وَأُمِّي وَأَخَوَايَ وَأَنَا.</a:t>
@@ -9449,6 +9524,7 @@
                   <a:srgbClr val="1B3B6F"/>
                 </a:solidFill>
                 <a:latin typeface="Amiri" pitchFamily="2" charset="-78"/>
+                <a:ea typeface="Amiri" pitchFamily="2" charset="-78"/>
                 <a:cs typeface="Amiri" pitchFamily="2" charset="-78"/>
               </a:rPr>
               <a:t>صُورَةٌ جَمِيلَةٌ! كَمْ شَخْصًا فِي أُسْرَتِكَ؟</a:t>
@@ -9552,6 +9628,7 @@
                   <a:srgbClr val="1B3B6F"/>
                 </a:solidFill>
                 <a:latin typeface="Amiri" pitchFamily="2" charset="-78"/>
+                <a:ea typeface="Amiri" pitchFamily="2" charset="-78"/>
                 <a:cs typeface="Amiri" pitchFamily="2" charset="-78"/>
               </a:rPr>
               <a:t>هٰذَا أَبِي، وَهُوَ طَبِيبٌ فِي مُسْتَشْفًى كَبِيرٍ.</a:t>
@@ -9628,6 +9705,7 @@
                   <a:srgbClr val="1B3B6F"/>
                 </a:solidFill>
                 <a:latin typeface="Amiri" pitchFamily="2" charset="-78"/>
+                <a:ea typeface="Amiri" pitchFamily="2" charset="-78"/>
                 <a:cs typeface="Amiri" pitchFamily="2" charset="-78"/>
               </a:rPr>
               <a:t>مَنْ هٰذَا الرَّجُلُ؟</a:t>
@@ -9731,6 +9809,7 @@
                   <a:srgbClr val="1B3B6F"/>
                 </a:solidFill>
                 <a:latin typeface="Amiri" pitchFamily="2" charset="-78"/>
+                <a:ea typeface="Amiri" pitchFamily="2" charset="-78"/>
                 <a:cs typeface="Amiri" pitchFamily="2" charset="-78"/>
               </a:rPr>
               <a:t>هٰذِهِ بِنْتُ عَمِّي، عُمْرُهَا سِتُّ سَنَوَاتٍ.</a:t>
@@ -9807,6 +9886,7 @@
                   <a:srgbClr val="1B3B6F"/>
                 </a:solidFill>
                 <a:latin typeface="Amiri" pitchFamily="2" charset="-78"/>
+                <a:ea typeface="Amiri" pitchFamily="2" charset="-78"/>
                 <a:cs typeface="Amiri" pitchFamily="2" charset="-78"/>
               </a:rPr>
               <a:t>وَمَنْ هٰذِهِ البِنْتُ الصَّغِيرَةُ؟</a:t>
@@ -9910,6 +9990,7 @@
                   <a:srgbClr val="1B3B6F"/>
                 </a:solidFill>
                 <a:latin typeface="Amiri" pitchFamily="2" charset="-78"/>
+                <a:ea typeface="Amiri" pitchFamily="2" charset="-78"/>
                 <a:cs typeface="Amiri" pitchFamily="2" charset="-78"/>
               </a:rPr>
               <a:t>نَعَمْ، جَدِّي وَجَدَّتِي يَسْكُنَانِ فِي الأُرْدُنِّ.</a:t>
@@ -9986,6 +10067,7 @@
                   <a:srgbClr val="1B3B6F"/>
                 </a:solidFill>
                 <a:latin typeface="Amiri" pitchFamily="2" charset="-78"/>
+                <a:ea typeface="Amiri" pitchFamily="2" charset="-78"/>
                 <a:cs typeface="Amiri" pitchFamily="2" charset="-78"/>
               </a:rPr>
               <a:t>هَلْ عِنْدَكَ أَجْدَادٌ؟</a:t>
@@ -10089,6 +10171,7 @@
                   <a:srgbClr val="1B3B6F"/>
                 </a:solidFill>
                 <a:latin typeface="Amiri" pitchFamily="2" charset="-78"/>
+                <a:ea typeface="Amiri" pitchFamily="2" charset="-78"/>
                 <a:cs typeface="Amiri" pitchFamily="2" charset="-78"/>
               </a:rPr>
               <a:t>أَخِي الأَكْبَرُ، لِأَنَّهُ يُسَاعِدُنِي دَائِمًا.</a:t>
@@ -10165,6 +10248,7 @@
                   <a:srgbClr val="1B3B6F"/>
                 </a:solidFill>
                 <a:latin typeface="Amiri" pitchFamily="2" charset="-78"/>
+                <a:ea typeface="Amiri" pitchFamily="2" charset="-78"/>
                 <a:cs typeface="Amiri" pitchFamily="2" charset="-78"/>
               </a:rPr>
               <a:t>مَنْ أَقْرَبُ شَخْصٍ إِلَيْكَ؟</a:t>
@@ -10374,6 +10458,7 @@
                   <a:srgbClr val="D4AF37"/>
                 </a:solidFill>
                 <a:latin typeface="Amiri" pitchFamily="2" charset="-78"/>
+                <a:ea typeface="Amiri" pitchFamily="2" charset="-78"/>
                 <a:cs typeface="Amiri" pitchFamily="2" charset="-78"/>
               </a:rPr>
               <a:t>م</a:t>
@@ -10694,6 +10779,7 @@
                   <a:srgbClr val="8A6D1E"/>
                 </a:solidFill>
                 <a:latin typeface="Amiri" pitchFamily="2" charset="-78"/>
+                <a:ea typeface="Amiri" pitchFamily="2" charset="-78"/>
                 <a:cs typeface="Amiri" pitchFamily="2" charset="-78"/>
               </a:rPr>
               <a:t>نَمُوذَجُ الإِجَابَةِ</a:t>
@@ -10936,6 +11022,7 @@
                   <a:srgbClr val="1B3B6F"/>
                 </a:solidFill>
                 <a:latin typeface="Amiri" pitchFamily="2" charset="-78"/>
+                <a:ea typeface="Amiri" pitchFamily="2" charset="-78"/>
                 <a:cs typeface="Amiri" pitchFamily="2" charset="-78"/>
               </a:rPr>
               <a:t>سَنَزُورُكُمْ يَوْمَ الجُمُعَةِ بَعْدَ الصَّلَاةِ، إِنْ شَاءَ اللّٰهُ.</a:t>
@@ -11012,6 +11099,7 @@
                   <a:srgbClr val="1B3B6F"/>
                 </a:solidFill>
                 <a:latin typeface="Amiri" pitchFamily="2" charset="-78"/>
+                <a:ea typeface="Amiri" pitchFamily="2" charset="-78"/>
                 <a:cs typeface="Amiri" pitchFamily="2" charset="-78"/>
               </a:rPr>
               <a:t>أَهْلًا يَا حَبِيبِي! مَتَى سَتَزُورُونَنَا؟</a:t>
@@ -11115,6 +11203,7 @@
                   <a:srgbClr val="1B3B6F"/>
                 </a:solidFill>
                 <a:latin typeface="Amiri" pitchFamily="2" charset="-78"/>
+                <a:ea typeface="Amiri" pitchFamily="2" charset="-78"/>
                 <a:cs typeface="Amiri" pitchFamily="2" charset="-78"/>
               </a:rPr>
               <a:t>سَيَأْتِي أَبِي وَأُمِّي وَأُخْتَايَ الصَّغِيرَتَانِ.</a:t>
@@ -11191,6 +11280,7 @@
                   <a:srgbClr val="1B3B6F"/>
                 </a:solidFill>
                 <a:latin typeface="Amiri" pitchFamily="2" charset="-78"/>
+                <a:ea typeface="Amiri" pitchFamily="2" charset="-78"/>
                 <a:cs typeface="Amiri" pitchFamily="2" charset="-78"/>
               </a:rPr>
               <a:t>مَنْ سَيَأْتِي مَعَكَ؟</a:t>
@@ -11294,6 +11384,7 @@
                   <a:srgbClr val="1B3B6F"/>
                 </a:solidFill>
                 <a:latin typeface="Amiri" pitchFamily="2" charset="-78"/>
+                <a:ea typeface="Amiri" pitchFamily="2" charset="-78"/>
                 <a:cs typeface="Amiri" pitchFamily="2" charset="-78"/>
               </a:rPr>
               <a:t>وَكَيْفَ حَالُ أَوْلَادِ خَالَتِي؟ هَلْ نَجَحَ يُوسُفُ فِي الامْتِحَانِ؟</a:t>
@@ -11370,6 +11461,7 @@
                   <a:srgbClr val="1B3B6F"/>
                 </a:solidFill>
                 <a:latin typeface="Amiri" pitchFamily="2" charset="-78"/>
+                <a:ea typeface="Amiri" pitchFamily="2" charset="-78"/>
                 <a:cs typeface="Amiri" pitchFamily="2" charset="-78"/>
               </a:rPr>
               <a:t>أَوْلَادِي يَنْتَظِرُونَكَ!</a:t>
@@ -11473,6 +11565,7 @@
                   <a:srgbClr val="1B3B6F"/>
                 </a:solidFill>
                 <a:latin typeface="Amiri" pitchFamily="2" charset="-78"/>
+                <a:ea typeface="Amiri" pitchFamily="2" charset="-78"/>
                 <a:cs typeface="Amiri" pitchFamily="2" charset="-78"/>
               </a:rPr>
               <a:t>أُحِبُّ المَنْسَفَ الَّذِي تَطْبُخِينَهُ، فَهُوَ أَلَذُّ مَنْسَفٍ فِي العَائِلَةِ!</a:t>
@@ -11549,6 +11642,7 @@
                   <a:srgbClr val="1B3B6F"/>
                 </a:solidFill>
                 <a:latin typeface="Amiri" pitchFamily="2" charset="-78"/>
+                <a:ea typeface="Amiri" pitchFamily="2" charset="-78"/>
                 <a:cs typeface="Amiri" pitchFamily="2" charset="-78"/>
               </a:rPr>
               <a:t>نَعَمْ! مَاذَا تُحِبُّ أَنْ تَأْكُلَ؟</a:t>
@@ -11652,6 +11746,7 @@
                   <a:srgbClr val="1B3B6F"/>
                 </a:solidFill>
                 <a:latin typeface="Amiri" pitchFamily="2" charset="-78"/>
+                <a:ea typeface="Amiri" pitchFamily="2" charset="-78"/>
                 <a:cs typeface="Amiri" pitchFamily="2" charset="-78"/>
               </a:rPr>
               <a:t>سَنَلْعَبُ كُرَةَ القَدَمِ فِي الحَدِيقَةِ مَعَ أَوْلَادِ خَالَتِي.</a:t>
@@ -11728,6 +11823,7 @@
                   <a:srgbClr val="1B3B6F"/>
                 </a:solidFill>
                 <a:latin typeface="Amiri" pitchFamily="2" charset="-78"/>
+                <a:ea typeface="Amiri" pitchFamily="2" charset="-78"/>
                 <a:cs typeface="Amiri" pitchFamily="2" charset="-78"/>
               </a:rPr>
               <a:t>مَاذَا سَتَفْعَلُونَ بَعْدَ الغَدَاءِ؟</a:t>
@@ -11937,6 +12033,7 @@
                   <a:srgbClr val="D4AF37"/>
                 </a:solidFill>
                 <a:latin typeface="Amiri" pitchFamily="2" charset="-78"/>
+                <a:ea typeface="Amiri" pitchFamily="2" charset="-78"/>
                 <a:cs typeface="Amiri" pitchFamily="2" charset="-78"/>
               </a:rPr>
               <a:t>م</a:t>
@@ -12257,6 +12354,7 @@
                   <a:srgbClr val="8A6D1E"/>
                 </a:solidFill>
                 <a:latin typeface="Amiri" pitchFamily="2" charset="-78"/>
+                <a:ea typeface="Amiri" pitchFamily="2" charset="-78"/>
                 <a:cs typeface="Amiri" pitchFamily="2" charset="-78"/>
               </a:rPr>
               <a:t>نَمُوذَجُ الإِجَابَةِ</a:t>
@@ -12499,6 +12597,7 @@
                   <a:srgbClr val="1B3B6F"/>
                 </a:solidFill>
                 <a:latin typeface="Amiri" pitchFamily="2" charset="-78"/>
+                <a:ea typeface="Amiri" pitchFamily="2" charset="-78"/>
                 <a:cs typeface="Amiri" pitchFamily="2" charset="-78"/>
               </a:rPr>
               <a:t>لَا تَحْزَنِي! مَاذَا حَدَثَ بِالضَّبْطِ؟</a:t>
@@ -12575,6 +12674,7 @@
                   <a:srgbClr val="1B3B6F"/>
                 </a:solidFill>
                 <a:latin typeface="Amiri" pitchFamily="2" charset="-78"/>
+                <a:ea typeface="Amiri" pitchFamily="2" charset="-78"/>
                 <a:cs typeface="Amiri" pitchFamily="2" charset="-78"/>
               </a:rPr>
               <a:t>تَشَاجَرْتُ مَعَ أُخْتِي أَمْسِ.</a:t>
@@ -12678,6 +12778,7 @@
                   <a:srgbClr val="1B3B6F"/>
                 </a:solidFill>
                 <a:latin typeface="Amiri" pitchFamily="2" charset="-78"/>
+                <a:ea typeface="Amiri" pitchFamily="2" charset="-78"/>
                 <a:cs typeface="Amiri" pitchFamily="2" charset="-78"/>
               </a:rPr>
               <a:t>أَنَا أَيْضًا أَتَشَاجَرُ مَعَ أَخِي أَحْيَانًا، لِأَنَّهُ يَأْخُذُ أَغْرَاضِي.</a:t>
@@ -12754,6 +12855,7 @@
                   <a:srgbClr val="1B3B6F"/>
                 </a:solidFill>
                 <a:latin typeface="Amiri" pitchFamily="2" charset="-78"/>
+                <a:ea typeface="Amiri" pitchFamily="2" charset="-78"/>
                 <a:cs typeface="Amiri" pitchFamily="2" charset="-78"/>
               </a:rPr>
               <a:t>أَخَذَتْ مَلَابِسِي بِدُونِ إِذْنٍ.</a:t>
@@ -12857,6 +12959,7 @@
                   <a:srgbClr val="1B3B6F"/>
                 </a:solidFill>
                 <a:latin typeface="Amiri" pitchFamily="2" charset="-78"/>
+                <a:ea typeface="Amiri" pitchFamily="2" charset="-78"/>
                 <a:cs typeface="Amiri" pitchFamily="2" charset="-78"/>
               </a:rPr>
               <a:t>يَجِبُ أَنْ تَتَكَلَّمِي مَعَهَا بِهُدُوءٍ، وَأَنْ تَتَّفِقَا عَلَى قَوَاعِدَ وَاضِحَةٍ.</a:t>
@@ -12933,6 +13036,7 @@
                   <a:srgbClr val="1B3B6F"/>
                 </a:solidFill>
                 <a:latin typeface="Amiri" pitchFamily="2" charset="-78"/>
+                <a:ea typeface="Amiri" pitchFamily="2" charset="-78"/>
                 <a:cs typeface="Amiri" pitchFamily="2" charset="-78"/>
               </a:rPr>
               <a:t>مَاذَا أَفْعَلُ الآنَ؟</a:t>
@@ -13036,6 +13140,7 @@
                   <a:srgbClr val="1B3B6F"/>
                 </a:solidFill>
                 <a:latin typeface="Amiri" pitchFamily="2" charset="-78"/>
+                <a:ea typeface="Amiri" pitchFamily="2" charset="-78"/>
                 <a:cs typeface="Amiri" pitchFamily="2" charset="-78"/>
               </a:rPr>
               <a:t>لِمَاذَا لَا تَطْلُبِينَ مِنْ أُمِّكِ أَنْ تَتَكَلَّمَ مَعَكُمَا؟</a:t>
@@ -13112,6 +13217,7 @@
                   <a:srgbClr val="1B3B6F"/>
                 </a:solidFill>
                 <a:latin typeface="Amiri" pitchFamily="2" charset="-78"/>
+                <a:ea typeface="Amiri" pitchFamily="2" charset="-78"/>
                 <a:cs typeface="Amiri" pitchFamily="2" charset="-78"/>
               </a:rPr>
               <a:t>… لٰكِنَّهَا أَكْبَرُ مِنِّي، وَلَا تَسْمَعُنِي!</a:t>
@@ -13215,6 +13321,7 @@
                   <a:srgbClr val="1B3B6F"/>
                 </a:solidFill>
                 <a:latin typeface="Amiri" pitchFamily="2" charset="-78"/>
+                <a:ea typeface="Amiri" pitchFamily="2" charset="-78"/>
                 <a:cs typeface="Amiri" pitchFamily="2" charset="-78"/>
               </a:rPr>
               <a:t>كُنَّا نَتَشَاجَرُ كَثِيرًا وَنَحْنُ صِغَارٌ، أَمَّا الآنَ فَنَحْنُ صَدِيقَانِ.</a:t>
@@ -13291,6 +13398,7 @@
                   <a:srgbClr val="1B3B6F"/>
                 </a:solidFill>
                 <a:latin typeface="Amiri" pitchFamily="2" charset="-78"/>
+                <a:ea typeface="Amiri" pitchFamily="2" charset="-78"/>
                 <a:cs typeface="Amiri" pitchFamily="2" charset="-78"/>
               </a:rPr>
               <a:t>هَلْ أَنْتِ قَرِيبَةٌ مِنْ أَخِيكِ؟</a:t>
@@ -13500,6 +13608,7 @@
                   <a:srgbClr val="D4AF37"/>
                 </a:solidFill>
                 <a:latin typeface="Amiri" pitchFamily="2" charset="-78"/>
+                <a:ea typeface="Amiri" pitchFamily="2" charset="-78"/>
                 <a:cs typeface="Amiri" pitchFamily="2" charset="-78"/>
               </a:rPr>
               <a:t>م</a:t>
@@ -13820,6 +13929,7 @@
                   <a:srgbClr val="8A6D1E"/>
                 </a:solidFill>
                 <a:latin typeface="Amiri" pitchFamily="2" charset="-78"/>
+                <a:ea typeface="Amiri" pitchFamily="2" charset="-78"/>
                 <a:cs typeface="Amiri" pitchFamily="2" charset="-78"/>
               </a:rPr>
               <a:t>نَمُوذَجُ الإِجَابَةِ</a:t>
@@ -14062,6 +14172,7 @@
                   <a:srgbClr val="1B3B6F"/>
                 </a:solidFill>
                 <a:latin typeface="Amiri" pitchFamily="2" charset="-78"/>
+                <a:ea typeface="Amiri" pitchFamily="2" charset="-78"/>
                 <a:cs typeface="Amiri" pitchFamily="2" charset="-78"/>
               </a:rPr>
               <a:t>كَانَتِ الأُسَرُ تَعِيشُ مَعًا فِي بَيْتٍ وَاحِدٍ كَبِيرٍ، أَمَّا اليَوْمَ فَيَسْكُنُ كُلُّ فَرْدٍ فِي مَدِينَةٍ.</a:t>
@@ -14138,6 +14249,7 @@
                   <a:srgbClr val="1B3B6F"/>
                 </a:solidFill>
                 <a:latin typeface="Amiri" pitchFamily="2" charset="-78"/>
+                <a:ea typeface="Amiri" pitchFamily="2" charset="-78"/>
                 <a:cs typeface="Amiri" pitchFamily="2" charset="-78"/>
               </a:rPr>
               <a:t>هَلْ تَغَيَّرَتِ الأُسْرَةُ عَنْ أَيَّامِ أَجْدَادِكَ؟</a:t>
@@ -14241,6 +14353,7 @@
                   <a:srgbClr val="1B3B6F"/>
                 </a:solidFill>
                 <a:latin typeface="Amiri" pitchFamily="2" charset="-78"/>
+                <a:ea typeface="Amiri" pitchFamily="2" charset="-78"/>
                 <a:cs typeface="Amiri" pitchFamily="2" charset="-78"/>
               </a:rPr>
               <a:t>جَدَّتِي تَسْكُنُ مَعَنَا، وَتَحْكِي لَنَا قِصَصًا كُلَّ لَيْلَةٍ، فَتَعَلَّمْتُ مِنْهَا الصَّبْرَ وَالعَرَبِيَّةَ.</a:t>
@@ -14317,6 +14430,7 @@
                   <a:srgbClr val="1B3B6F"/>
                 </a:solidFill>
                 <a:latin typeface="Amiri" pitchFamily="2" charset="-78"/>
+                <a:ea typeface="Amiri" pitchFamily="2" charset="-78"/>
                 <a:cs typeface="Amiri" pitchFamily="2" charset="-78"/>
               </a:rPr>
               <a:t>مَا دَوْرُ الأَجْدَادِ فِي حَيَاتِكَ؟</a:t>
@@ -14420,6 +14534,7 @@
                   <a:srgbClr val="1B3B6F"/>
                 </a:solidFill>
                 <a:latin typeface="Amiri" pitchFamily="2" charset="-78"/>
+                <a:ea typeface="Amiri" pitchFamily="2" charset="-78"/>
                 <a:cs typeface="Amiri" pitchFamily="2" charset="-78"/>
               </a:rPr>
               <a:t>صَحِيحٌ أَنَّ المُرَاهِقِينَ يَقْضُونَ وَقْتًا أَطْوَلَ مَعَ أَصْدِقَائِهِمْ، غَيْرَ أَنَّ العَائِلَةَ تَبْقَى عِنْدَمَا يَذْهَبُ الأَصْدِقَاءُ.</a:t>
@@ -14496,6 +14611,7 @@
                   <a:srgbClr val="1B3B6F"/>
                 </a:solidFill>
                 <a:latin typeface="Amiri" pitchFamily="2" charset="-78"/>
+                <a:ea typeface="Amiri" pitchFamily="2" charset="-78"/>
                 <a:cs typeface="Amiri" pitchFamily="2" charset="-78"/>
               </a:rPr>
               <a:t>هَلِ الأَصْدِقَاءُ أَهَمُّ مِنَ العَائِلَةِ لِلْمُرَاهِقِينَ؟</a:t>
@@ -14599,6 +14715,7 @@
                   <a:srgbClr val="1B3B6F"/>
                 </a:solidFill>
                 <a:latin typeface="Amiri" pitchFamily="2" charset="-78"/>
+                <a:ea typeface="Amiri" pitchFamily="2" charset="-78"/>
                 <a:cs typeface="Amiri" pitchFamily="2" charset="-78"/>
               </a:rPr>
               <a:t>تَجْعَلُنَا نَجْلِسُ مَعًا دُونَ أَنْ نَتَكَلَّمَ؛ فَمَثَلًا فِي العَشَاءِ يَنْظُرُ كُلُّ وَاحِدٍ إِلَى هَاتِفِهِ.</a:t>
@@ -14675,6 +14792,7 @@
                   <a:srgbClr val="1B3B6F"/>
                 </a:solidFill>
                 <a:latin typeface="Amiri" pitchFamily="2" charset="-78"/>
+                <a:ea typeface="Amiri" pitchFamily="2" charset="-78"/>
                 <a:cs typeface="Amiri" pitchFamily="2" charset="-78"/>
               </a:rPr>
               <a:t>كَيْفَ تُؤَثِّرُ الهَوَاتِفُ فِي العَلَاقَاتِ العَائِلِيَّةِ؟</a:t>
@@ -14778,6 +14896,7 @@
                   <a:srgbClr val="1B3B6F"/>
                 </a:solidFill>
                 <a:latin typeface="Amiri" pitchFamily="2" charset="-78"/>
+                <a:ea typeface="Amiri" pitchFamily="2" charset="-78"/>
                 <a:cs typeface="Amiri" pitchFamily="2" charset="-78"/>
               </a:rPr>
               <a:t>لَوْ وَضَعْتُ قَاعِدَةً، لَمَنَعْتُ الهَوَاتِفَ عَلَى المَائِدَةِ، لِكَيْ نَتَحَدَّثَ أَكْثَرَ.</a:t>
@@ -14854,6 +14973,7 @@
                   <a:srgbClr val="1B3B6F"/>
                 </a:solidFill>
                 <a:latin typeface="Amiri" pitchFamily="2" charset="-78"/>
+                <a:ea typeface="Amiri" pitchFamily="2" charset="-78"/>
                 <a:cs typeface="Amiri" pitchFamily="2" charset="-78"/>
               </a:rPr>
               <a:t>لَوْ وَضَعْتَ قَاعِدَةً وَاحِدَةً لِأُسْرَتِكَ، فَمَاذَا تَكُونُ؟</a:t>
@@ -15063,6 +15183,7 @@
                   <a:srgbClr val="D4AF37"/>
                 </a:solidFill>
                 <a:latin typeface="Amiri" pitchFamily="2" charset="-78"/>
+                <a:ea typeface="Amiri" pitchFamily="2" charset="-78"/>
                 <a:cs typeface="Amiri" pitchFamily="2" charset="-78"/>
               </a:rPr>
               <a:t>م</a:t>
@@ -15383,6 +15504,7 @@
                   <a:srgbClr val="8A6D1E"/>
                 </a:solidFill>
                 <a:latin typeface="Amiri" pitchFamily="2" charset="-78"/>
+                <a:ea typeface="Amiri" pitchFamily="2" charset="-78"/>
                 <a:cs typeface="Amiri" pitchFamily="2" charset="-78"/>
               </a:rPr>
               <a:t>أُسْرَتِي</a:t>
@@ -15663,6 +15785,7 @@
                   <a:srgbClr val="1B3B6F"/>
                 </a:solidFill>
                 <a:latin typeface="Amiri" pitchFamily="2" charset="-78"/>
+                <a:ea typeface="Amiri" pitchFamily="2" charset="-78"/>
                 <a:cs typeface="Amiri" pitchFamily="2" charset="-78"/>
               </a:rPr>
               <a:t>فِي أُسْرَتِي …</a:t>
@@ -15739,6 +15862,7 @@
                   <a:srgbClr val="1B3B6F"/>
                 </a:solidFill>
                 <a:latin typeface="Amiri" pitchFamily="2" charset="-78"/>
+                <a:ea typeface="Amiri" pitchFamily="2" charset="-78"/>
                 <a:cs typeface="Amiri" pitchFamily="2" charset="-78"/>
               </a:rPr>
               <a:t>صِفْ أُسْرَتَكَ.</a:t>
@@ -15907,6 +16031,7 @@
                   <a:srgbClr val="1B3B6F"/>
                 </a:solidFill>
                 <a:latin typeface="Amiri" pitchFamily="2" charset="-78"/>
+                <a:ea typeface="Amiri" pitchFamily="2" charset="-78"/>
                 <a:cs typeface="Amiri" pitchFamily="2" charset="-78"/>
               </a:rPr>
               <a:t>عِنْدِي … وَ…</a:t>
@@ -15983,6 +16108,7 @@
                   <a:srgbClr val="1B3B6F"/>
                 </a:solidFill>
                 <a:latin typeface="Amiri" pitchFamily="2" charset="-78"/>
+                <a:ea typeface="Amiri" pitchFamily="2" charset="-78"/>
                 <a:cs typeface="Amiri" pitchFamily="2" charset="-78"/>
               </a:rPr>
               <a:t>كَمْ أَخًا وَأُخْتًا عِنْدَكَ؟</a:t>
@@ -16151,6 +16277,7 @@
                   <a:srgbClr val="1B3B6F"/>
                 </a:solidFill>
                 <a:latin typeface="Amiri" pitchFamily="2" charset="-78"/>
+                <a:ea typeface="Amiri" pitchFamily="2" charset="-78"/>
                 <a:cs typeface="Amiri" pitchFamily="2" charset="-78"/>
               </a:rPr>
               <a:t>اسْمُ صَدِيقِي …</a:t>
@@ -16227,6 +16354,7 @@
                   <a:srgbClr val="1B3B6F"/>
                 </a:solidFill>
                 <a:latin typeface="Amiri" pitchFamily="2" charset="-78"/>
+                <a:ea typeface="Amiri" pitchFamily="2" charset="-78"/>
                 <a:cs typeface="Amiri" pitchFamily="2" charset="-78"/>
               </a:rPr>
               <a:t>مَا اسْمُ صَدِيقِكَ المُفَضَّلِ؟</a:t>
@@ -16395,6 +16523,7 @@
                   <a:srgbClr val="1B3B6F"/>
                 </a:solidFill>
                 <a:latin typeface="Amiri" pitchFamily="2" charset="-78"/>
+                <a:ea typeface="Amiri" pitchFamily="2" charset="-78"/>
                 <a:cs typeface="Amiri" pitchFamily="2" charset="-78"/>
               </a:rPr>
               <a:t>نَزُورُ … / نَأْكُلُ …</a:t>
@@ -16471,6 +16600,7 @@
                   <a:srgbClr val="1B3B6F"/>
                 </a:solidFill>
                 <a:latin typeface="Amiri" pitchFamily="2" charset="-78"/>
+                <a:ea typeface="Amiri" pitchFamily="2" charset="-78"/>
                 <a:cs typeface="Amiri" pitchFamily="2" charset="-78"/>
               </a:rPr>
               <a:t>مَاذَا تَفْعَلُ مَعَ أُسْرَتِكَ فِي نِهَايَةِ الأُسْبُوعِ؟</a:t>
@@ -16639,6 +16769,7 @@
                   <a:srgbClr val="1B3B6F"/>
                 </a:solidFill>
                 <a:latin typeface="Amiri" pitchFamily="2" charset="-78"/>
+                <a:ea typeface="Amiri" pitchFamily="2" charset="-78"/>
                 <a:cs typeface="Amiri" pitchFamily="2" charset="-78"/>
               </a:rPr>
               <a:t>نَعَمْ، أَتَّفِقُ مَعَ … لٰكِنْ …</a:t>
@@ -16715,6 +16846,7 @@
                   <a:srgbClr val="1B3B6F"/>
                 </a:solidFill>
                 <a:latin typeface="Amiri" pitchFamily="2" charset="-78"/>
+                <a:ea typeface="Amiri" pitchFamily="2" charset="-78"/>
                 <a:cs typeface="Amiri" pitchFamily="2" charset="-78"/>
               </a:rPr>
               <a:t>هَلْ تَتَّفِقُ مَعَ إِخْوَتِكَ؟</a:t>
@@ -16869,6 +17001,7 @@
                   <a:srgbClr val="1B3B6F"/>
                 </a:solidFill>
                 <a:latin typeface="Amiri" pitchFamily="2" charset="-78"/>
+                <a:ea typeface="Amiri" pitchFamily="2" charset="-78"/>
                 <a:cs typeface="Amiri" pitchFamily="2" charset="-78"/>
               </a:rPr>
               <a:t>عَفْوًا، هَلْ يُمْكِنُ أَنْ تُعِيدَ السُّؤَالَ؟</a:t>
@@ -17002,6 +17135,7 @@
                   <a:srgbClr val="D4AF37"/>
                 </a:solidFill>
                 <a:latin typeface="Amiri" pitchFamily="2" charset="-78"/>
+                <a:ea typeface="Amiri" pitchFamily="2" charset="-78"/>
                 <a:cs typeface="Amiri" pitchFamily="2" charset="-78"/>
               </a:rPr>
               <a:t>م</a:t>
@@ -17322,6 +17456,7 @@
                   <a:srgbClr val="8A6D1E"/>
                 </a:solidFill>
                 <a:latin typeface="Amiri" pitchFamily="2" charset="-78"/>
+                <a:ea typeface="Amiri" pitchFamily="2" charset="-78"/>
                 <a:cs typeface="Amiri" pitchFamily="2" charset="-78"/>
               </a:rPr>
               <a:t>العَائِلَةُ وَالأَصْدِقَاءُ</a:t>
@@ -17602,6 +17737,7 @@
                   <a:srgbClr val="1B3B6F"/>
                 </a:solidFill>
                 <a:latin typeface="Amiri" pitchFamily="2" charset="-78"/>
+                <a:ea typeface="Amiri" pitchFamily="2" charset="-78"/>
                 <a:cs typeface="Amiri" pitchFamily="2" charset="-78"/>
               </a:rPr>
               <a:t>صَدِيقِي … هُوَ … وَنَحْنُ …</a:t>
@@ -17678,6 +17814,7 @@
                   <a:srgbClr val="1B3B6F"/>
                 </a:solidFill>
                 <a:latin typeface="Amiri" pitchFamily="2" charset="-78"/>
+                <a:ea typeface="Amiri" pitchFamily="2" charset="-78"/>
                 <a:cs typeface="Amiri" pitchFamily="2" charset="-78"/>
               </a:rPr>
               <a:t>صِفْ صَدِيقَكَ المُفَضَّلَ.</a:t>
@@ -17781,6 +17918,7 @@
                   <a:srgbClr val="1B3B6F"/>
                 </a:solidFill>
                 <a:latin typeface="Amiri" pitchFamily="2" charset="-78"/>
+                <a:ea typeface="Amiri" pitchFamily="2" charset="-78"/>
                 <a:cs typeface="Amiri" pitchFamily="2" charset="-78"/>
               </a:rPr>
               <a:t>تَعَرَّفْتُ إِلَيْهِ عِنْدَمَا …</a:t>
@@ -17857,6 +17995,7 @@
                   <a:srgbClr val="1B3B6F"/>
                 </a:solidFill>
                 <a:latin typeface="Amiri" pitchFamily="2" charset="-78"/>
+                <a:ea typeface="Amiri" pitchFamily="2" charset="-78"/>
                 <a:cs typeface="Amiri" pitchFamily="2" charset="-78"/>
               </a:rPr>
               <a:t>كَيْفَ تَعَرَّفْتَ إِلَى صَدِيقِكَ؟</a:t>
@@ -17960,6 +18099,7 @@
                   <a:srgbClr val="1B3B6F"/>
                 </a:solidFill>
                 <a:latin typeface="Amiri" pitchFamily="2" charset="-78"/>
+                <a:ea typeface="Amiri" pitchFamily="2" charset="-78"/>
                 <a:cs typeface="Amiri" pitchFamily="2" charset="-78"/>
               </a:rPr>
               <a:t>أُحِبُّ … لِأَنَّهُ / لِأَنَّهَا …</a:t>
@@ -18036,6 +18176,7 @@
                   <a:srgbClr val="1B3B6F"/>
                 </a:solidFill>
                 <a:latin typeface="Amiri" pitchFamily="2" charset="-78"/>
+                <a:ea typeface="Amiri" pitchFamily="2" charset="-78"/>
                 <a:cs typeface="Amiri" pitchFamily="2" charset="-78"/>
               </a:rPr>
               <a:t>مَنْ تُحِبُّ أَكْثَرَ فِي عَائِلَتِكَ الكَبِيرَةِ؟ لِمَاذَا؟</a:t>
@@ -18139,6 +18280,7 @@
                   <a:srgbClr val="1B3B6F"/>
                 </a:solidFill>
                 <a:latin typeface="Amiri" pitchFamily="2" charset="-78"/>
+                <a:ea typeface="Amiri" pitchFamily="2" charset="-78"/>
                 <a:cs typeface="Amiri" pitchFamily="2" charset="-78"/>
               </a:rPr>
               <a:t>الصَّدِيقُ الجَيِّدُ … وَلَا …</a:t>
@@ -18215,6 +18357,7 @@
                   <a:srgbClr val="1B3B6F"/>
                 </a:solidFill>
                 <a:latin typeface="Amiri" pitchFamily="2" charset="-78"/>
+                <a:ea typeface="Amiri" pitchFamily="2" charset="-78"/>
                 <a:cs typeface="Amiri" pitchFamily="2" charset="-78"/>
               </a:rPr>
               <a:t>مَا صِفَاتُ الصَّدِيقِ الجَيِّدِ؟</a:t>
@@ -18318,6 +18461,7 @@
                   <a:srgbClr val="1B3B6F"/>
                 </a:solidFill>
                 <a:latin typeface="Amiri" pitchFamily="2" charset="-78"/>
+                <a:ea typeface="Amiri" pitchFamily="2" charset="-78"/>
                 <a:cs typeface="Amiri" pitchFamily="2" charset="-78"/>
               </a:rPr>
               <a:t>سَنَزُورُ … وَسَنَأْكُلُ …</a:t>
@@ -18394,6 +18538,7 @@
                   <a:srgbClr val="1B3B6F"/>
                 </a:solidFill>
                 <a:latin typeface="Amiri" pitchFamily="2" charset="-78"/>
+                <a:ea typeface="Amiri" pitchFamily="2" charset="-78"/>
                 <a:cs typeface="Amiri" pitchFamily="2" charset="-78"/>
               </a:rPr>
               <a:t>كَيْفَ سَتَحْتَفِلُ أُسْرَتُكَ بِالعِيدِ القَادِمِ؟</a:t>
@@ -18603,6 +18748,7 @@
                   <a:srgbClr val="D4AF37"/>
                 </a:solidFill>
                 <a:latin typeface="Amiri" pitchFamily="2" charset="-78"/>
+                <a:ea typeface="Amiri" pitchFamily="2" charset="-78"/>
                 <a:cs typeface="Amiri" pitchFamily="2" charset="-78"/>
               </a:rPr>
               <a:t>م</a:t>
@@ -18923,6 +19069,7 @@
                   <a:srgbClr val="8A6D1E"/>
                 </a:solidFill>
                 <a:latin typeface="Amiri" pitchFamily="2" charset="-78"/>
+                <a:ea typeface="Amiri" pitchFamily="2" charset="-78"/>
                 <a:cs typeface="Amiri" pitchFamily="2" charset="-78"/>
               </a:rPr>
               <a:t>العَلَاقَاتُ وَالمُجْتَمَعُ</a:t>
@@ -19203,6 +19350,7 @@
                   <a:srgbClr val="1B3B6F"/>
                 </a:solidFill>
                 <a:latin typeface="Amiri" pitchFamily="2" charset="-78"/>
+                <a:ea typeface="Amiri" pitchFamily="2" charset="-78"/>
                 <a:cs typeface="Amiri" pitchFamily="2" charset="-78"/>
               </a:rPr>
               <a:t>صَحِيحٌ أَنَّ … غَيْرَ أَنَّ …</a:t>
@@ -19279,6 +19427,7 @@
                   <a:srgbClr val="1B3B6F"/>
                 </a:solidFill>
                 <a:latin typeface="Amiri" pitchFamily="2" charset="-78"/>
+                <a:ea typeface="Amiri" pitchFamily="2" charset="-78"/>
                 <a:cs typeface="Amiri" pitchFamily="2" charset="-78"/>
               </a:rPr>
               <a:t>هَلِ الصَّدَاقَةُ عَلَى الإِنْتَرْنِتِ صَدَاقَةٌ حَقِيقِيَّةٌ؟</a:t>
@@ -19382,6 +19531,7 @@
                   <a:srgbClr val="1B3B6F"/>
                 </a:solidFill>
                 <a:latin typeface="Amiri" pitchFamily="2" charset="-78"/>
+                <a:ea typeface="Amiri" pitchFamily="2" charset="-78"/>
                 <a:cs typeface="Amiri" pitchFamily="2" charset="-78"/>
               </a:rPr>
               <a:t>لِأَنَّنَا … وَلِأَنَّ …</a:t>
@@ -19458,6 +19608,7 @@
                   <a:srgbClr val="1B3B6F"/>
                 </a:solidFill>
                 <a:latin typeface="Amiri" pitchFamily="2" charset="-78"/>
+                <a:ea typeface="Amiri" pitchFamily="2" charset="-78"/>
                 <a:cs typeface="Amiri" pitchFamily="2" charset="-78"/>
               </a:rPr>
               <a:t>لِمَاذَا تَتَغَيَّرُ الصَّدَاقَاتُ مَعَ الوَقْتِ؟</a:t>
@@ -19561,6 +19712,7 @@
                   <a:srgbClr val="1B3B6F"/>
                 </a:solidFill>
                 <a:latin typeface="Amiri" pitchFamily="2" charset="-78"/>
+                <a:ea typeface="Amiri" pitchFamily="2" charset="-78"/>
                 <a:cs typeface="Amiri" pitchFamily="2" charset="-78"/>
               </a:rPr>
               <a:t>أَعْتَقِدُ أَنَّ … لِأَنَّ …</a:t>
@@ -19637,6 +19789,7 @@
                   <a:srgbClr val="1B3B6F"/>
                 </a:solidFill>
                 <a:latin typeface="Amiri" pitchFamily="2" charset="-78"/>
+                <a:ea typeface="Amiri" pitchFamily="2" charset="-78"/>
                 <a:cs typeface="Amiri" pitchFamily="2" charset="-78"/>
               </a:rPr>
               <a:t>هَلْ يَجِبُ أَنْ يَسْكُنَ الأَجْدَادُ مَعَ أَوْلَادِهِمْ؟</a:t>
@@ -19740,6 +19893,7 @@
                   <a:srgbClr val="1B3B6F"/>
                 </a:solidFill>
                 <a:latin typeface="Amiri" pitchFamily="2" charset="-78"/>
+                <a:ea typeface="Amiri" pitchFamily="2" charset="-78"/>
                 <a:cs typeface="Amiri" pitchFamily="2" charset="-78"/>
               </a:rPr>
               <a:t>عِنْدَمَا … سَاعَدَنِي … فَنَجَحْتُ …</a:t>
@@ -19816,6 +19970,7 @@
                   <a:srgbClr val="1B3B6F"/>
                 </a:solidFill>
                 <a:latin typeface="Amiri" pitchFamily="2" charset="-78"/>
+                <a:ea typeface="Amiri" pitchFamily="2" charset="-78"/>
                 <a:cs typeface="Amiri" pitchFamily="2" charset="-78"/>
               </a:rPr>
               <a:t>صِفْ مَوْقِفًا سَاعَدَكَ فِيهِ أَحَدُ أَفْرَادِ أُسْرَتِكَ.</a:t>
@@ -19919,6 +20074,7 @@
                   <a:srgbClr val="1B3B6F"/>
                 </a:solidFill>
                 <a:latin typeface="Amiri" pitchFamily="2" charset="-78"/>
+                <a:ea typeface="Amiri" pitchFamily="2" charset="-78"/>
                 <a:cs typeface="Amiri" pitchFamily="2" charset="-78"/>
               </a:rPr>
               <a:t>لَوْ كَانَ عِنْدِي …، لَمَا شَعَرْتُ …</a:t>
@@ -19995,6 +20151,7 @@
                   <a:srgbClr val="1B3B6F"/>
                 </a:solidFill>
                 <a:latin typeface="Amiri" pitchFamily="2" charset="-78"/>
+                <a:ea typeface="Amiri" pitchFamily="2" charset="-78"/>
                 <a:cs typeface="Amiri" pitchFamily="2" charset="-78"/>
               </a:rPr>
               <a:t>لَوْ كَانَ عِنْدَكَ أَخٌ تَوْأَمٌ، كَيْفَ تَكُونُ حَيَاتُكَ؟</a:t>
@@ -20204,6 +20361,7 @@
                   <a:srgbClr val="D4AF37"/>
                 </a:solidFill>
                 <a:latin typeface="Amiri" pitchFamily="2" charset="-78"/>
+                <a:ea typeface="Amiri" pitchFamily="2" charset="-78"/>
                 <a:cs typeface="Amiri" pitchFamily="2" charset="-78"/>
               </a:rPr>
               <a:t>م</a:t>
@@ -20524,6 +20682,7 @@
                   <a:srgbClr val="8A6D1E"/>
                 </a:solidFill>
                 <a:latin typeface="Amiri" pitchFamily="2" charset="-78"/>
+                <a:ea typeface="Amiri" pitchFamily="2" charset="-78"/>
                 <a:cs typeface="Amiri" pitchFamily="2" charset="-78"/>
               </a:rPr>
               <a:t>آدَابُ الصَّفِّ</a:t>
@@ -22055,6 +22214,7 @@
                   <a:srgbClr val="D4AF37"/>
                 </a:solidFill>
                 <a:latin typeface="Amiri" pitchFamily="2" charset="-78"/>
+                <a:ea typeface="Amiri" pitchFamily="2" charset="-78"/>
                 <a:cs typeface="Amiri" pitchFamily="2" charset="-78"/>
               </a:rPr>
               <a:t>م</a:t>
@@ -22375,6 +22535,7 @@
                   <a:srgbClr val="8A6D1E"/>
                 </a:solidFill>
                 <a:latin typeface="Amiri" pitchFamily="2" charset="-78"/>
+                <a:ea typeface="Amiri" pitchFamily="2" charset="-78"/>
                 <a:cs typeface="Amiri" pitchFamily="2" charset="-78"/>
               </a:rPr>
               <a:t>نَمُوذَجُ الإِجَابَةِ</a:t>
@@ -22617,6 +22778,7 @@
                   <a:srgbClr val="1B3B6F"/>
                 </a:solidFill>
                 <a:latin typeface="Amiri" pitchFamily="2" charset="-78"/>
+                <a:ea typeface="Amiri" pitchFamily="2" charset="-78"/>
                 <a:cs typeface="Amiri" pitchFamily="2" charset="-78"/>
               </a:rPr>
               <a:t>فِي أُسْرَتِي سِتَّةُ أَشْخَاصٍ، وَأَنَا الابْنُ الأَصْغَرُ.</a:t>
@@ -22693,6 +22855,7 @@
                   <a:srgbClr val="1B3B6F"/>
                 </a:solidFill>
                 <a:latin typeface="Amiri" pitchFamily="2" charset="-78"/>
+                <a:ea typeface="Amiri" pitchFamily="2" charset="-78"/>
                 <a:cs typeface="Amiri" pitchFamily="2" charset="-78"/>
               </a:rPr>
               <a:t>صِفْ أُسْرَتَكَ.</a:t>
@@ -22796,6 +22959,7 @@
                   <a:srgbClr val="1B3B6F"/>
                 </a:solidFill>
                 <a:latin typeface="Amiri" pitchFamily="2" charset="-78"/>
+                <a:ea typeface="Amiri" pitchFamily="2" charset="-78"/>
                 <a:cs typeface="Amiri" pitchFamily="2" charset="-78"/>
               </a:rPr>
               <a:t>عِنْدِي أَخٌ وَاحِدٌ وَأُخْتَانِ.</a:t>
@@ -22872,6 +23036,7 @@
                   <a:srgbClr val="1B3B6F"/>
                 </a:solidFill>
                 <a:latin typeface="Amiri" pitchFamily="2" charset="-78"/>
+                <a:ea typeface="Amiri" pitchFamily="2" charset="-78"/>
                 <a:cs typeface="Amiri" pitchFamily="2" charset="-78"/>
               </a:rPr>
               <a:t>كَمْ أَخًا وَأُخْتًا عِنْدَكَ؟</a:t>
@@ -22975,6 +23140,7 @@
                   <a:srgbClr val="1B3B6F"/>
                 </a:solidFill>
                 <a:latin typeface="Amiri" pitchFamily="2" charset="-78"/>
+                <a:ea typeface="Amiri" pitchFamily="2" charset="-78"/>
                 <a:cs typeface="Amiri" pitchFamily="2" charset="-78"/>
               </a:rPr>
               <a:t>اسْمُ صَدِيقِي المُفَضَّلِ يَاسِرٌ، وَهُوَ فِي صَفِّي.</a:t>
@@ -23051,6 +23217,7 @@
                   <a:srgbClr val="1B3B6F"/>
                 </a:solidFill>
                 <a:latin typeface="Amiri" pitchFamily="2" charset="-78"/>
+                <a:ea typeface="Amiri" pitchFamily="2" charset="-78"/>
                 <a:cs typeface="Amiri" pitchFamily="2" charset="-78"/>
               </a:rPr>
               <a:t>مَا اسْمُ صَدِيقِكَ المُفَضَّلِ؟</a:t>
@@ -23154,6 +23321,7 @@
                   <a:srgbClr val="1B3B6F"/>
                 </a:solidFill>
                 <a:latin typeface="Amiri" pitchFamily="2" charset="-78"/>
+                <a:ea typeface="Amiri" pitchFamily="2" charset="-78"/>
                 <a:cs typeface="Amiri" pitchFamily="2" charset="-78"/>
               </a:rPr>
               <a:t>نَزُورُ جَدِّي وَجَدَّتِي، وَنَأْكُلُ الغَدَاءَ مَعًا.</a:t>
@@ -23230,6 +23398,7 @@
                   <a:srgbClr val="1B3B6F"/>
                 </a:solidFill>
                 <a:latin typeface="Amiri" pitchFamily="2" charset="-78"/>
+                <a:ea typeface="Amiri" pitchFamily="2" charset="-78"/>
                 <a:cs typeface="Amiri" pitchFamily="2" charset="-78"/>
               </a:rPr>
               <a:t>مَاذَا تَفْعَلُ مَعَ أُسْرَتِكَ فِي نِهَايَةِ الأُسْبُوعِ؟</a:t>
@@ -23333,6 +23502,7 @@
                   <a:srgbClr val="1B3B6F"/>
                 </a:solidFill>
                 <a:latin typeface="Amiri" pitchFamily="2" charset="-78"/>
+                <a:ea typeface="Amiri" pitchFamily="2" charset="-78"/>
                 <a:cs typeface="Amiri" pitchFamily="2" charset="-78"/>
               </a:rPr>
               <a:t>نَعَمْ، أَتَّفِقُ مَعَ أُخْتِي، لٰكِنِّي أَتَشَاجَرُ مَعَ أَخِي أَحْيَانًا.</a:t>
@@ -23409,6 +23579,7 @@
                   <a:srgbClr val="1B3B6F"/>
                 </a:solidFill>
                 <a:latin typeface="Amiri" pitchFamily="2" charset="-78"/>
+                <a:ea typeface="Amiri" pitchFamily="2" charset="-78"/>
                 <a:cs typeface="Amiri" pitchFamily="2" charset="-78"/>
               </a:rPr>
               <a:t>هَلْ تَتَّفِقُ مَعَ إِخْوَتِكَ؟</a:t>
@@ -23618,6 +23789,7 @@
                   <a:srgbClr val="D4AF37"/>
                 </a:solidFill>
                 <a:latin typeface="Amiri" pitchFamily="2" charset="-78"/>
+                <a:ea typeface="Amiri" pitchFamily="2" charset="-78"/>
                 <a:cs typeface="Amiri" pitchFamily="2" charset="-78"/>
               </a:rPr>
               <a:t>م</a:t>
@@ -23938,6 +24110,7 @@
                   <a:srgbClr val="8A6D1E"/>
                 </a:solidFill>
                 <a:latin typeface="Amiri" pitchFamily="2" charset="-78"/>
+                <a:ea typeface="Amiri" pitchFamily="2" charset="-78"/>
                 <a:cs typeface="Amiri" pitchFamily="2" charset="-78"/>
               </a:rPr>
               <a:t>نَمُوذَجُ الإِجَابَةِ</a:t>
@@ -24180,6 +24353,7 @@
                   <a:srgbClr val="1B3B6F"/>
                 </a:solidFill>
                 <a:latin typeface="Amiri" pitchFamily="2" charset="-78"/>
+                <a:ea typeface="Amiri" pitchFamily="2" charset="-78"/>
                 <a:cs typeface="Amiri" pitchFamily="2" charset="-78"/>
               </a:rPr>
               <a:t>صَدِيقِي يَاسِرٌ طَوِيلٌ وَمَرِحٌ، وَنَحْنُ أَصْدِقَاءُ مُنْذُ المَدْرَسَةِ الابْتِدَائِيَّةِ.</a:t>
@@ -24256,6 +24430,7 @@
                   <a:srgbClr val="1B3B6F"/>
                 </a:solidFill>
                 <a:latin typeface="Amiri" pitchFamily="2" charset="-78"/>
+                <a:ea typeface="Amiri" pitchFamily="2" charset="-78"/>
                 <a:cs typeface="Amiri" pitchFamily="2" charset="-78"/>
               </a:rPr>
               <a:t>صِفْ صَدِيقَكَ المُفَضَّلَ.</a:t>
@@ -24359,6 +24534,7 @@
                   <a:srgbClr val="1B3B6F"/>
                 </a:solidFill>
                 <a:latin typeface="Amiri" pitchFamily="2" charset="-78"/>
+                <a:ea typeface="Amiri" pitchFamily="2" charset="-78"/>
                 <a:cs typeface="Amiri" pitchFamily="2" charset="-78"/>
               </a:rPr>
               <a:t>تَعَرَّفْتُ إِلَيْهِ عِنْدَمَا جَلَسْنَا مَعًا فِي الحَافِلَةِ فِي رِحْلَةٍ مَدْرَسِيَّةٍ.</a:t>
@@ -24435,6 +24611,7 @@
                   <a:srgbClr val="1B3B6F"/>
                 </a:solidFill>
                 <a:latin typeface="Amiri" pitchFamily="2" charset="-78"/>
+                <a:ea typeface="Amiri" pitchFamily="2" charset="-78"/>
                 <a:cs typeface="Amiri" pitchFamily="2" charset="-78"/>
               </a:rPr>
               <a:t>كَيْفَ تَعَرَّفْتَ إِلَى صَدِيقِكَ؟</a:t>
@@ -24538,6 +24715,7 @@
                   <a:srgbClr val="1B3B6F"/>
                 </a:solidFill>
                 <a:latin typeface="Amiri" pitchFamily="2" charset="-78"/>
+                <a:ea typeface="Amiri" pitchFamily="2" charset="-78"/>
                 <a:cs typeface="Amiri" pitchFamily="2" charset="-78"/>
               </a:rPr>
               <a:t>أُحِبُّ خَالِي كَثِيرًا، لِأَنَّهُ مَرِحٌ وَيَأْخُذُنَا إِلَى مُبَارَيَاتِ كُرَةِ القَدَمِ.</a:t>
@@ -24614,6 +24792,7 @@
                   <a:srgbClr val="1B3B6F"/>
                 </a:solidFill>
                 <a:latin typeface="Amiri" pitchFamily="2" charset="-78"/>
+                <a:ea typeface="Amiri" pitchFamily="2" charset="-78"/>
                 <a:cs typeface="Amiri" pitchFamily="2" charset="-78"/>
               </a:rPr>
               <a:t>مَنْ تُحِبُّ أَكْثَرَ فِي عَائِلَتِكَ الكَبِيرَةِ؟ لِمَاذَا؟</a:t>
@@ -24717,6 +24896,7 @@
                   <a:srgbClr val="1B3B6F"/>
                 </a:solidFill>
                 <a:latin typeface="Amiri" pitchFamily="2" charset="-78"/>
+                <a:ea typeface="Amiri" pitchFamily="2" charset="-78"/>
                 <a:cs typeface="Amiri" pitchFamily="2" charset="-78"/>
               </a:rPr>
               <a:t>الصَّدِيقُ الجَيِّدُ يَسْمَعُكَ وَيُسَاعِدُكَ، وَلَا يَتَكَلَّمُ عَنْكَ أَمَامَ الآخَرِينَ.</a:t>
@@ -24793,6 +24973,7 @@
                   <a:srgbClr val="1B3B6F"/>
                 </a:solidFill>
                 <a:latin typeface="Amiri" pitchFamily="2" charset="-78"/>
+                <a:ea typeface="Amiri" pitchFamily="2" charset="-78"/>
                 <a:cs typeface="Amiri" pitchFamily="2" charset="-78"/>
               </a:rPr>
               <a:t>مَا صِفَاتُ الصَّدِيقِ الجَيِّدِ؟</a:t>
@@ -24896,6 +25077,7 @@
                   <a:srgbClr val="1B3B6F"/>
                 </a:solidFill>
                 <a:latin typeface="Amiri" pitchFamily="2" charset="-78"/>
+                <a:ea typeface="Amiri" pitchFamily="2" charset="-78"/>
                 <a:cs typeface="Amiri" pitchFamily="2" charset="-78"/>
               </a:rPr>
               <a:t>سَنَزُورُ كُلَّ الأَقَارِبِ، وَسَنَأْكُلُ الحَلَوِيَّاتِ، وَسَأَلْبَسُ مَلَابِسَ جَدِيدَةً.</a:t>
@@ -24972,6 +25154,7 @@
                   <a:srgbClr val="1B3B6F"/>
                 </a:solidFill>
                 <a:latin typeface="Amiri" pitchFamily="2" charset="-78"/>
+                <a:ea typeface="Amiri" pitchFamily="2" charset="-78"/>
                 <a:cs typeface="Amiri" pitchFamily="2" charset="-78"/>
               </a:rPr>
               <a:t>كَيْفَ سَتَحْتَفِلُ أُسْرَتُكَ بِالعِيدِ القَادِمِ؟</a:t>
@@ -25181,6 +25364,7 @@
                   <a:srgbClr val="D4AF37"/>
                 </a:solidFill>
                 <a:latin typeface="Amiri" pitchFamily="2" charset="-78"/>
+                <a:ea typeface="Amiri" pitchFamily="2" charset="-78"/>
                 <a:cs typeface="Amiri" pitchFamily="2" charset="-78"/>
               </a:rPr>
               <a:t>م</a:t>
@@ -25501,6 +25685,7 @@
                   <a:srgbClr val="8A6D1E"/>
                 </a:solidFill>
                 <a:latin typeface="Amiri" pitchFamily="2" charset="-78"/>
+                <a:ea typeface="Amiri" pitchFamily="2" charset="-78"/>
                 <a:cs typeface="Amiri" pitchFamily="2" charset="-78"/>
               </a:rPr>
               <a:t>نَمُوذَجُ الإِجَابَةِ</a:t>
@@ -25743,6 +25928,7 @@
                   <a:srgbClr val="1B3B6F"/>
                 </a:solidFill>
                 <a:latin typeface="Amiri" pitchFamily="2" charset="-78"/>
+                <a:ea typeface="Amiri" pitchFamily="2" charset="-78"/>
                 <a:cs typeface="Amiri" pitchFamily="2" charset="-78"/>
               </a:rPr>
               <a:t>صَحِيحٌ أَنَّنَا نَتَعَرَّفُ إِلَى أَشْخَاصٍ رَائِعِينَ عَلَى الإِنْتَرْنِتِ، غَيْرَ أَنَّ الصَّدِيقَ الحَقِيقِيَّ هُوَ الَّذِي يَقِفُ بِجَانِبِكَ فِي الصُّعُوبَاتِ.</a:t>
@@ -25819,6 +26005,7 @@
                   <a:srgbClr val="1B3B6F"/>
                 </a:solidFill>
                 <a:latin typeface="Amiri" pitchFamily="2" charset="-78"/>
+                <a:ea typeface="Amiri" pitchFamily="2" charset="-78"/>
                 <a:cs typeface="Amiri" pitchFamily="2" charset="-78"/>
               </a:rPr>
               <a:t>هَلِ الصَّدَاقَةُ عَلَى الإِنْتَرْنِتِ صَدَاقَةٌ حَقِيقِيَّةٌ؟</a:t>
@@ -25922,6 +26109,7 @@
                   <a:srgbClr val="1B3B6F"/>
                 </a:solidFill>
                 <a:latin typeface="Amiri" pitchFamily="2" charset="-78"/>
+                <a:ea typeface="Amiri" pitchFamily="2" charset="-78"/>
                 <a:cs typeface="Amiri" pitchFamily="2" charset="-78"/>
               </a:rPr>
               <a:t>لِأَنَّنَا نَكْبُرُ وَتَتَغَيَّرُ اهْتِمَامَاتُنَا، وَلِأَنَّ بَعْضَ الأَصْدِقَاءِ يَنْتَقِلُونَ إِلَى مُدُنٍ أُخْرَى.</a:t>
@@ -25998,6 +26186,7 @@
                   <a:srgbClr val="1B3B6F"/>
                 </a:solidFill>
                 <a:latin typeface="Amiri" pitchFamily="2" charset="-78"/>
+                <a:ea typeface="Amiri" pitchFamily="2" charset="-78"/>
                 <a:cs typeface="Amiri" pitchFamily="2" charset="-78"/>
               </a:rPr>
               <a:t>لِمَاذَا تَتَغَيَّرُ الصَّدَاقَاتُ مَعَ الوَقْتِ؟</a:t>
@@ -26101,6 +26290,7 @@
                   <a:srgbClr val="1B3B6F"/>
                 </a:solidFill>
                 <a:latin typeface="Amiri" pitchFamily="2" charset="-78"/>
+                <a:ea typeface="Amiri" pitchFamily="2" charset="-78"/>
                 <a:cs typeface="Amiri" pitchFamily="2" charset="-78"/>
               </a:rPr>
               <a:t>أَعْتَقِدُ أَنَّ ذٰلِكَ أَفْضَلُ، لِأَنَّ الأَجْدَادَ يُعْطُونَ الأَحْفَادَ الحِكْمَةَ، وَالأَحْفَادُ يُعْطُونَهُمُ الفَرَحَ.</a:t>
@@ -26177,6 +26367,7 @@
                   <a:srgbClr val="1B3B6F"/>
                 </a:solidFill>
                 <a:latin typeface="Amiri" pitchFamily="2" charset="-78"/>
+                <a:ea typeface="Amiri" pitchFamily="2" charset="-78"/>
                 <a:cs typeface="Amiri" pitchFamily="2" charset="-78"/>
               </a:rPr>
               <a:t>هَلْ يَجِبُ أَنْ يَسْكُنَ الأَجْدَادُ مَعَ أَوْلَادِهِمْ؟</a:t>
@@ -26386,6 +26577,7 @@
                   <a:srgbClr val="D4AF37"/>
                 </a:solidFill>
                 <a:latin typeface="Amiri" pitchFamily="2" charset="-78"/>
+                <a:ea typeface="Amiri" pitchFamily="2" charset="-78"/>
                 <a:cs typeface="Amiri" pitchFamily="2" charset="-78"/>
               </a:rPr>
               <a:t>م</a:t>
@@ -26706,6 +26898,7 @@
                   <a:srgbClr val="8A6D1E"/>
                 </a:solidFill>
                 <a:latin typeface="Amiri" pitchFamily="2" charset="-78"/>
+                <a:ea typeface="Amiri" pitchFamily="2" charset="-78"/>
                 <a:cs typeface="Amiri" pitchFamily="2" charset="-78"/>
               </a:rPr>
               <a:t>نَمُوذَجُ الإِجَابَةِ</a:t>
@@ -26948,6 +27141,7 @@
                   <a:srgbClr val="1B3B6F"/>
                 </a:solidFill>
                 <a:latin typeface="Amiri" pitchFamily="2" charset="-78"/>
+                <a:ea typeface="Amiri" pitchFamily="2" charset="-78"/>
                 <a:cs typeface="Amiri" pitchFamily="2" charset="-78"/>
               </a:rPr>
               <a:t>عِنْدَمَا رَسَبْتُ فِي امْتِحَانِ الرِّيَاضِيَّاتِ، دَرَسَ مَعِي أَخِي الأَكْبَرُ كُلَّ لَيْلَةٍ، فَنَجَحْتُ فِي المَرَّةِ التَّالِيَةِ.</a:t>
@@ -27024,6 +27218,7 @@
                   <a:srgbClr val="1B3B6F"/>
                 </a:solidFill>
                 <a:latin typeface="Amiri" pitchFamily="2" charset="-78"/>
+                <a:ea typeface="Amiri" pitchFamily="2" charset="-78"/>
                 <a:cs typeface="Amiri" pitchFamily="2" charset="-78"/>
               </a:rPr>
               <a:t>صِفْ مَوْقِفًا سَاعَدَكَ فِيهِ أَحَدُ أَفْرَادِ أُسْرَتِكَ.</a:t>
@@ -27127,6 +27322,7 @@
                   <a:srgbClr val="1B3B6F"/>
                 </a:solidFill>
                 <a:latin typeface="Amiri" pitchFamily="2" charset="-78"/>
+                <a:ea typeface="Amiri" pitchFamily="2" charset="-78"/>
                 <a:cs typeface="Amiri" pitchFamily="2" charset="-78"/>
               </a:rPr>
               <a:t>لَوْ كَانَ عِنْدِي أَخٌ تَوْأَمٌ، لَمَا شَعَرْتُ بِالوَحْدَةِ أَبَدًا، وَلَتَشَاجَرْنَا عَلَى كُلِّ شَيْءٍ!</a:t>
@@ -27203,6 +27399,7 @@
                   <a:srgbClr val="1B3B6F"/>
                 </a:solidFill>
                 <a:latin typeface="Amiri" pitchFamily="2" charset="-78"/>
+                <a:ea typeface="Amiri" pitchFamily="2" charset="-78"/>
                 <a:cs typeface="Amiri" pitchFamily="2" charset="-78"/>
               </a:rPr>
               <a:t>لَوْ كَانَ عِنْدَكَ أَخٌ تَوْأَمٌ، كَيْفَ تَكُونُ حَيَاتُكَ؟</a:t>
@@ -27412,6 +27609,7 @@
                   <a:srgbClr val="D4AF37"/>
                 </a:solidFill>
                 <a:latin typeface="Amiri" pitchFamily="2" charset="-78"/>
+                <a:ea typeface="Amiri" pitchFamily="2" charset="-78"/>
                 <a:cs typeface="Amiri" pitchFamily="2" charset="-78"/>
               </a:rPr>
               <a:t>م</a:t>
@@ -27732,6 +27930,7 @@
                   <a:srgbClr val="8A6D1E"/>
                 </a:solidFill>
                 <a:latin typeface="Amiri" pitchFamily="2" charset="-78"/>
+                <a:ea typeface="Amiri" pitchFamily="2" charset="-78"/>
                 <a:cs typeface="Amiri" pitchFamily="2" charset="-78"/>
               </a:rPr>
               <a:t>قَيِّمْ عَمَلَكَ</a:t>
@@ -28976,6 +29175,7 @@
                   <a:srgbClr val="FFFFFF"/>
                 </a:solidFill>
                 <a:latin typeface="Amiri" pitchFamily="2" charset="-78"/>
+                <a:ea typeface="Amiri" pitchFamily="2" charset="-78"/>
                 <a:cs typeface="Amiri" pitchFamily="2" charset="-78"/>
               </a:rPr>
               <a:t>أَحْسَنْتُمْ! إِلَى اللِّقَاءِ</a:t>
@@ -29128,6 +29328,7 @@
                   <a:srgbClr val="D4AF37"/>
                 </a:solidFill>
                 <a:latin typeface="Amiri" pitchFamily="2" charset="-78"/>
+                <a:ea typeface="Amiri" pitchFamily="2" charset="-78"/>
                 <a:cs typeface="Amiri" pitchFamily="2" charset="-78"/>
               </a:rPr>
               <a:t>وَرْشَةُ الكِتَابَةِ</a:t>
@@ -29261,6 +29462,7 @@
                   <a:srgbClr val="D4AF37"/>
                 </a:solidFill>
                 <a:latin typeface="Amiri" pitchFamily="2" charset="-78"/>
+                <a:ea typeface="Amiri" pitchFamily="2" charset="-78"/>
                 <a:cs typeface="Amiri" pitchFamily="2" charset="-78"/>
               </a:rPr>
               <a:t>م</a:t>
@@ -29581,6 +29783,7 @@
                   <a:srgbClr val="8A6D1E"/>
                 </a:solidFill>
                 <a:latin typeface="Amiri" pitchFamily="2" charset="-78"/>
+                <a:ea typeface="Amiri" pitchFamily="2" charset="-78"/>
                 <a:cs typeface="Amiri" pitchFamily="2" charset="-78"/>
               </a:rPr>
               <a:t>خَرِيطَةُ الوَرْشَةِ</a:t>
@@ -29895,6 +30098,7 @@
                   <a:srgbClr val="1B3B6F"/>
                 </a:solidFill>
                 <a:latin typeface="Amiri" pitchFamily="2" charset="-78"/>
+                <a:ea typeface="Amiri" pitchFamily="2" charset="-78"/>
                 <a:cs typeface="Amiri" pitchFamily="2" charset="-78"/>
               </a:rPr>
               <a:t>كَيْفَ</a:t>
@@ -30171,6 +30375,7 @@
                   <a:srgbClr val="1E6B52"/>
                 </a:solidFill>
                 <a:latin typeface="Amiri" pitchFamily="2" charset="-78"/>
+                <a:ea typeface="Amiri" pitchFamily="2" charset="-78"/>
                 <a:cs typeface="Amiri" pitchFamily="2" charset="-78"/>
               </a:rPr>
               <a:t>تَمْثِيلُ الدَّوْرِ</a:t>
@@ -30447,6 +30652,7 @@
                   <a:srgbClr val="8A6D1E"/>
                 </a:solidFill>
                 <a:latin typeface="Amiri" pitchFamily="2" charset="-78"/>
+                <a:ea typeface="Amiri" pitchFamily="2" charset="-78"/>
                 <a:cs typeface="Amiri" pitchFamily="2" charset="-78"/>
               </a:rPr>
               <a:t>النَّمُوذَجُ</a:t>
@@ -30723,6 +30929,7 @@
                   <a:srgbClr val="1E6B52"/>
                 </a:solidFill>
                 <a:latin typeface="Amiri" pitchFamily="2" charset="-78"/>
+                <a:ea typeface="Amiri" pitchFamily="2" charset="-78"/>
                 <a:cs typeface="Amiri" pitchFamily="2" charset="-78"/>
               </a:rPr>
               <a:t>المُحَادَثَةُ</a:t>
@@ -30999,6 +31206,7 @@
                   <a:srgbClr val="8A6D1E"/>
                 </a:solidFill>
                 <a:latin typeface="Amiri" pitchFamily="2" charset="-78"/>
+                <a:ea typeface="Amiri" pitchFamily="2" charset="-78"/>
                 <a:cs typeface="Amiri" pitchFamily="2" charset="-78"/>
               </a:rPr>
               <a:t>قَيِّمْ</a:t>
@@ -31242,6 +31450,7 @@
                   <a:srgbClr val="D4AF37"/>
                 </a:solidFill>
                 <a:latin typeface="Amiri" pitchFamily="2" charset="-78"/>
+                <a:ea typeface="Amiri" pitchFamily="2" charset="-78"/>
                 <a:cs typeface="Amiri" pitchFamily="2" charset="-78"/>
               </a:rPr>
               <a:t>م</a:t>
@@ -31562,6 +31771,7 @@
                   <a:srgbClr val="8A6D1E"/>
                 </a:solidFill>
                 <a:latin typeface="Amiri" pitchFamily="2" charset="-78"/>
+                <a:ea typeface="Amiri" pitchFamily="2" charset="-78"/>
                 <a:cs typeface="Amiri" pitchFamily="2" charset="-78"/>
               </a:rPr>
               <a:t>امْتِحَانُ التَّحَدُّثِ</a:t>
@@ -32186,6 +32396,7 @@
                   <a:srgbClr val="1B3B6F"/>
                 </a:solidFill>
                 <a:latin typeface="Amiri" pitchFamily="2" charset="-78"/>
+                <a:ea typeface="Amiri" pitchFamily="2" charset="-78"/>
                 <a:cs typeface="Amiri" pitchFamily="2" charset="-78"/>
               </a:rPr>
               <a:t>عَفْوًا، هَلْ يُمْكِنُ أَنْ تُعِيدَ السُّؤَالَ؟</a:t>
@@ -32285,6 +32496,7 @@
                   <a:srgbClr val="1B3B6F"/>
                 </a:solidFill>
                 <a:latin typeface="Amiri" pitchFamily="2" charset="-78"/>
+                <a:ea typeface="Amiri" pitchFamily="2" charset="-78"/>
                 <a:cs typeface="Amiri" pitchFamily="2" charset="-78"/>
               </a:rPr>
               <a:t>لَحْظَةً، دَعْنِي أُفَكِّرُ …</a:t>
@@ -32384,6 +32596,7 @@
                   <a:srgbClr val="1B3B6F"/>
                 </a:solidFill>
                 <a:latin typeface="Amiri" pitchFamily="2" charset="-78"/>
+                <a:ea typeface="Amiri" pitchFamily="2" charset="-78"/>
                 <a:cs typeface="Amiri" pitchFamily="2" charset="-78"/>
               </a:rPr>
               <a:t>أَقْصِدُ …</a:t>
@@ -32555,6 +32768,7 @@
                   <a:srgbClr val="D4AF37"/>
                 </a:solidFill>
                 <a:latin typeface="Amiri" pitchFamily="2" charset="-78"/>
+                <a:ea typeface="Amiri" pitchFamily="2" charset="-78"/>
                 <a:cs typeface="Amiri" pitchFamily="2" charset="-78"/>
               </a:rPr>
               <a:t>م</a:t>
@@ -32875,6 +33089,7 @@
                   <a:srgbClr val="8A6D1E"/>
                 </a:solidFill>
                 <a:latin typeface="Amiri" pitchFamily="2" charset="-78"/>
+                <a:ea typeface="Amiri" pitchFamily="2" charset="-78"/>
                 <a:cs typeface="Amiri" pitchFamily="2" charset="-78"/>
               </a:rPr>
               <a:t>مَنْ فِي أُسْرَتِكَ؟</a:t>
@@ -33178,6 +33393,7 @@
                   <a:srgbClr val="1B3B6F"/>
                 </a:solidFill>
                 <a:latin typeface="Amiri" pitchFamily="2" charset="-78"/>
+                <a:ea typeface="Amiri" pitchFamily="2" charset="-78"/>
                 <a:cs typeface="Amiri" pitchFamily="2" charset="-78"/>
               </a:rPr>
               <a:t>أَخٌ</a:t>
@@ -33335,6 +33551,7 @@
                   <a:srgbClr val="1B3B6F"/>
                 </a:solidFill>
                 <a:latin typeface="Amiri" pitchFamily="2" charset="-78"/>
+                <a:ea typeface="Amiri" pitchFamily="2" charset="-78"/>
                 <a:cs typeface="Amiri" pitchFamily="2" charset="-78"/>
               </a:rPr>
               <a:t>إِخْوَةٌ</a:t>
@@ -33438,6 +33655,7 @@
                   <a:srgbClr val="1B3B6F"/>
                 </a:solidFill>
                 <a:latin typeface="Amiri" pitchFamily="2" charset="-78"/>
+                <a:ea typeface="Amiri" pitchFamily="2" charset="-78"/>
                 <a:cs typeface="Amiri" pitchFamily="2" charset="-78"/>
               </a:rPr>
               <a:t>أَخَوَانِ</a:t>
@@ -33541,6 +33759,7 @@
                   <a:srgbClr val="1B3B6F"/>
                 </a:solidFill>
                 <a:latin typeface="Amiri" pitchFamily="2" charset="-78"/>
+                <a:ea typeface="Amiri" pitchFamily="2" charset="-78"/>
                 <a:cs typeface="Amiri" pitchFamily="2" charset="-78"/>
               </a:rPr>
               <a:t>أَخِي</a:t>
@@ -33806,6 +34025,7 @@
                   <a:srgbClr val="1B3B6F"/>
                 </a:solidFill>
                 <a:latin typeface="Amiri" pitchFamily="2" charset="-78"/>
+                <a:ea typeface="Amiri" pitchFamily="2" charset="-78"/>
                 <a:cs typeface="Amiri" pitchFamily="2" charset="-78"/>
               </a:rPr>
               <a:t>أُخْتٌ</a:t>
@@ -33963,6 +34183,7 @@
                   <a:srgbClr val="1B3B6F"/>
                 </a:solidFill>
                 <a:latin typeface="Amiri" pitchFamily="2" charset="-78"/>
+                <a:ea typeface="Amiri" pitchFamily="2" charset="-78"/>
                 <a:cs typeface="Amiri" pitchFamily="2" charset="-78"/>
               </a:rPr>
               <a:t>أَخَوَاتٌ</a:t>
@@ -34066,6 +34287,7 @@
                   <a:srgbClr val="1B3B6F"/>
                 </a:solidFill>
                 <a:latin typeface="Amiri" pitchFamily="2" charset="-78"/>
+                <a:ea typeface="Amiri" pitchFamily="2" charset="-78"/>
                 <a:cs typeface="Amiri" pitchFamily="2" charset="-78"/>
               </a:rPr>
               <a:t>أُخْتَانِ</a:t>
@@ -34169,6 +34391,7 @@
                   <a:srgbClr val="1B3B6F"/>
                 </a:solidFill>
                 <a:latin typeface="Amiri" pitchFamily="2" charset="-78"/>
+                <a:ea typeface="Amiri" pitchFamily="2" charset="-78"/>
                 <a:cs typeface="Amiri" pitchFamily="2" charset="-78"/>
               </a:rPr>
               <a:t>أُخْتِي</a:t>
@@ -34434,6 +34657,7 @@
                   <a:srgbClr val="1B3B6F"/>
                 </a:solidFill>
                 <a:latin typeface="Amiri" pitchFamily="2" charset="-78"/>
+                <a:ea typeface="Amiri" pitchFamily="2" charset="-78"/>
                 <a:cs typeface="Amiri" pitchFamily="2" charset="-78"/>
               </a:rPr>
               <a:t>عَمٌّ · عَمَّةٌ</a:t>
@@ -34591,6 +34815,7 @@
                   <a:srgbClr val="1B3B6F"/>
                 </a:solidFill>
                 <a:latin typeface="Amiri" pitchFamily="2" charset="-78"/>
+                <a:ea typeface="Amiri" pitchFamily="2" charset="-78"/>
                 <a:cs typeface="Amiri" pitchFamily="2" charset="-78"/>
               </a:rPr>
               <a:t>أَعْمَامٌ · عَمَّاتٌ</a:t>
@@ -34694,6 +34919,7 @@
                   <a:srgbClr val="1B3B6F"/>
                 </a:solidFill>
                 <a:latin typeface="Amiri" pitchFamily="2" charset="-78"/>
+                <a:ea typeface="Amiri" pitchFamily="2" charset="-78"/>
                 <a:cs typeface="Amiri" pitchFamily="2" charset="-78"/>
               </a:rPr>
               <a:t>عَمِّي · عَمَّتِي</a:t>
@@ -34959,6 +35185,7 @@
                   <a:srgbClr val="1B3B6F"/>
                 </a:solidFill>
                 <a:latin typeface="Amiri" pitchFamily="2" charset="-78"/>
+                <a:ea typeface="Amiri" pitchFamily="2" charset="-78"/>
                 <a:cs typeface="Amiri" pitchFamily="2" charset="-78"/>
               </a:rPr>
               <a:t>خَالٌ · خَالَةٌ</a:t>
@@ -35116,6 +35343,7 @@
                   <a:srgbClr val="1B3B6F"/>
                 </a:solidFill>
                 <a:latin typeface="Amiri" pitchFamily="2" charset="-78"/>
+                <a:ea typeface="Amiri" pitchFamily="2" charset="-78"/>
                 <a:cs typeface="Amiri" pitchFamily="2" charset="-78"/>
               </a:rPr>
               <a:t>أَخْوَالٌ · خَالَاتٌ</a:t>
@@ -35219,6 +35447,7 @@
                   <a:srgbClr val="1B3B6F"/>
                 </a:solidFill>
                 <a:latin typeface="Amiri" pitchFamily="2" charset="-78"/>
+                <a:ea typeface="Amiri" pitchFamily="2" charset="-78"/>
                 <a:cs typeface="Amiri" pitchFamily="2" charset="-78"/>
               </a:rPr>
               <a:t>خَالِي · خَالَتِي</a:t>
@@ -35484,6 +35713,7 @@
                   <a:srgbClr val="1B3B6F"/>
                 </a:solidFill>
                 <a:latin typeface="Amiri" pitchFamily="2" charset="-78"/>
+                <a:ea typeface="Amiri" pitchFamily="2" charset="-78"/>
                 <a:cs typeface="Amiri" pitchFamily="2" charset="-78"/>
               </a:rPr>
               <a:t>ابْنُ عَمِّي</a:t>
@@ -35641,6 +35871,7 @@
                   <a:srgbClr val="1B3B6F"/>
                 </a:solidFill>
                 <a:latin typeface="Amiri" pitchFamily="2" charset="-78"/>
+                <a:ea typeface="Amiri" pitchFamily="2" charset="-78"/>
                 <a:cs typeface="Amiri" pitchFamily="2" charset="-78"/>
               </a:rPr>
               <a:t>أَوْلَادُ عَمِّي</a:t>
@@ -35744,6 +35975,7 @@
                   <a:srgbClr val="1B3B6F"/>
                 </a:solidFill>
                 <a:latin typeface="Amiri" pitchFamily="2" charset="-78"/>
+                <a:ea typeface="Amiri" pitchFamily="2" charset="-78"/>
                 <a:cs typeface="Amiri" pitchFamily="2" charset="-78"/>
               </a:rPr>
               <a:t>بِنْتُ عَمِّي</a:t>
@@ -36009,6 +36241,7 @@
                   <a:srgbClr val="1B3B6F"/>
                 </a:solidFill>
                 <a:latin typeface="Amiri" pitchFamily="2" charset="-78"/>
+                <a:ea typeface="Amiri" pitchFamily="2" charset="-78"/>
                 <a:cs typeface="Amiri" pitchFamily="2" charset="-78"/>
               </a:rPr>
               <a:t>جَدٌّ · جَدَّةٌ</a:t>
@@ -36166,6 +36399,7 @@
                   <a:srgbClr val="1B3B6F"/>
                 </a:solidFill>
                 <a:latin typeface="Amiri" pitchFamily="2" charset="-78"/>
+                <a:ea typeface="Amiri" pitchFamily="2" charset="-78"/>
                 <a:cs typeface="Amiri" pitchFamily="2" charset="-78"/>
               </a:rPr>
               <a:t>أَجْدَادٌ</a:t>
@@ -36269,6 +36503,7 @@
                   <a:srgbClr val="1B3B6F"/>
                 </a:solidFill>
                 <a:latin typeface="Amiri" pitchFamily="2" charset="-78"/>
+                <a:ea typeface="Amiri" pitchFamily="2" charset="-78"/>
                 <a:cs typeface="Amiri" pitchFamily="2" charset="-78"/>
               </a:rPr>
               <a:t>جَدِّي · جَدَّتِي</a:t>
@@ -36402,6 +36637,7 @@
                   <a:srgbClr val="D4AF37"/>
                 </a:solidFill>
                 <a:latin typeface="Amiri" pitchFamily="2" charset="-78"/>
+                <a:ea typeface="Amiri" pitchFamily="2" charset="-78"/>
                 <a:cs typeface="Amiri" pitchFamily="2" charset="-78"/>
               </a:rPr>
               <a:t>م</a:t>
@@ -36722,6 +36958,7 @@
                   <a:srgbClr val="8A6D1E"/>
                 </a:solidFill>
                 <a:latin typeface="Amiri" pitchFamily="2" charset="-78"/>
+                <a:ea typeface="Amiri" pitchFamily="2" charset="-78"/>
                 <a:cs typeface="Amiri" pitchFamily="2" charset="-78"/>
               </a:rPr>
               <a:t>العَلَاقَاتُ</a:t>
@@ -37025,6 +37262,7 @@
                   <a:srgbClr val="1B3B6F"/>
                 </a:solidFill>
                 <a:latin typeface="Amiri" pitchFamily="2" charset="-78"/>
+                <a:ea typeface="Amiri" pitchFamily="2" charset="-78"/>
                 <a:cs typeface="Amiri" pitchFamily="2" charset="-78"/>
               </a:rPr>
               <a:t>صَدِيقٌ</a:t>
@@ -37182,6 +37420,7 @@
                   <a:srgbClr val="1B3B6F"/>
                 </a:solidFill>
                 <a:latin typeface="Amiri" pitchFamily="2" charset="-78"/>
+                <a:ea typeface="Amiri" pitchFamily="2" charset="-78"/>
                 <a:cs typeface="Amiri" pitchFamily="2" charset="-78"/>
               </a:rPr>
               <a:t>أَصْدِقَاءُ</a:t>
@@ -37285,6 +37524,7 @@
                   <a:srgbClr val="1B3B6F"/>
                 </a:solidFill>
                 <a:latin typeface="Amiri" pitchFamily="2" charset="-78"/>
+                <a:ea typeface="Amiri" pitchFamily="2" charset="-78"/>
                 <a:cs typeface="Amiri" pitchFamily="2" charset="-78"/>
               </a:rPr>
               <a:t>صَدِيقَةٌ</a:t>
@@ -37388,6 +37628,7 @@
                   <a:srgbClr val="1B3B6F"/>
                 </a:solidFill>
                 <a:latin typeface="Amiri" pitchFamily="2" charset="-78"/>
+                <a:ea typeface="Amiri" pitchFamily="2" charset="-78"/>
                 <a:cs typeface="Amiri" pitchFamily="2" charset="-78"/>
               </a:rPr>
               <a:t>صَدِيقٌ</a:t>
@@ -37653,6 +37894,7 @@
                   <a:srgbClr val="1B3B6F"/>
                 </a:solidFill>
                 <a:latin typeface="Amiri" pitchFamily="2" charset="-78"/>
+                <a:ea typeface="Amiri" pitchFamily="2" charset="-78"/>
                 <a:cs typeface="Amiri" pitchFamily="2" charset="-78"/>
               </a:rPr>
               <a:t>أَتَّفِقُ مَعَ …</a:t>
@@ -37810,6 +38052,7 @@
                   <a:srgbClr val="1B3B6F"/>
                 </a:solidFill>
                 <a:latin typeface="Amiri" pitchFamily="2" charset="-78"/>
+                <a:ea typeface="Amiri" pitchFamily="2" charset="-78"/>
                 <a:cs typeface="Amiri" pitchFamily="2" charset="-78"/>
               </a:rPr>
               <a:t>نَتَّفِقُ</a:t>
@@ -37913,6 +38156,7 @@
                   <a:srgbClr val="1B3B6F"/>
                 </a:solidFill>
                 <a:latin typeface="Amiri" pitchFamily="2" charset="-78"/>
+                <a:ea typeface="Amiri" pitchFamily="2" charset="-78"/>
                 <a:cs typeface="Amiri" pitchFamily="2" charset="-78"/>
               </a:rPr>
               <a:t>تَتَّفِقُ</a:t>
@@ -38016,6 +38260,7 @@
                   <a:srgbClr val="1B3B6F"/>
                 </a:solidFill>
                 <a:latin typeface="Amiri" pitchFamily="2" charset="-78"/>
+                <a:ea typeface="Amiri" pitchFamily="2" charset="-78"/>
                 <a:cs typeface="Amiri" pitchFamily="2" charset="-78"/>
               </a:rPr>
               <a:t>يَتَّفِقُ</a:t>
@@ -38281,6 +38526,7 @@
                   <a:srgbClr val="1B3B6F"/>
                 </a:solidFill>
                 <a:latin typeface="Amiri" pitchFamily="2" charset="-78"/>
+                <a:ea typeface="Amiri" pitchFamily="2" charset="-78"/>
                 <a:cs typeface="Amiri" pitchFamily="2" charset="-78"/>
               </a:rPr>
               <a:t>أَتَشَاجَرُ مَعَ …</a:t>
@@ -38438,6 +38684,7 @@
                   <a:srgbClr val="1B3B6F"/>
                 </a:solidFill>
                 <a:latin typeface="Amiri" pitchFamily="2" charset="-78"/>
+                <a:ea typeface="Amiri" pitchFamily="2" charset="-78"/>
                 <a:cs typeface="Amiri" pitchFamily="2" charset="-78"/>
               </a:rPr>
               <a:t>نَتَشَاجَرُ</a:t>
@@ -38541,6 +38788,7 @@
                   <a:srgbClr val="1B3B6F"/>
                 </a:solidFill>
                 <a:latin typeface="Amiri" pitchFamily="2" charset="-78"/>
+                <a:ea typeface="Amiri" pitchFamily="2" charset="-78"/>
                 <a:cs typeface="Amiri" pitchFamily="2" charset="-78"/>
               </a:rPr>
               <a:t>تَتَشَاجَرُ</a:t>
@@ -38644,6 +38892,7 @@
                   <a:srgbClr val="1B3B6F"/>
                 </a:solidFill>
                 <a:latin typeface="Amiri" pitchFamily="2" charset="-78"/>
+                <a:ea typeface="Amiri" pitchFamily="2" charset="-78"/>
                 <a:cs typeface="Amiri" pitchFamily="2" charset="-78"/>
               </a:rPr>
               <a:t>يَتَشَاجَرُ</a:t>
@@ -38909,6 +39158,7 @@
                   <a:srgbClr val="1B3B6F"/>
                 </a:solidFill>
                 <a:latin typeface="Amiri" pitchFamily="2" charset="-78"/>
+                <a:ea typeface="Amiri" pitchFamily="2" charset="-78"/>
                 <a:cs typeface="Amiri" pitchFamily="2" charset="-78"/>
               </a:rPr>
               <a:t>قَرِيبٌ مِنْ …</a:t>
@@ -39066,6 +39316,7 @@
                   <a:srgbClr val="1B3B6F"/>
                 </a:solidFill>
                 <a:latin typeface="Amiri" pitchFamily="2" charset="-78"/>
+                <a:ea typeface="Amiri" pitchFamily="2" charset="-78"/>
                 <a:cs typeface="Amiri" pitchFamily="2" charset="-78"/>
               </a:rPr>
               <a:t>قَرِيبُونَ</a:t>
@@ -39169,6 +39420,7 @@
                   <a:srgbClr val="1B3B6F"/>
                 </a:solidFill>
                 <a:latin typeface="Amiri" pitchFamily="2" charset="-78"/>
+                <a:ea typeface="Amiri" pitchFamily="2" charset="-78"/>
                 <a:cs typeface="Amiri" pitchFamily="2" charset="-78"/>
               </a:rPr>
               <a:t>قَرِيبَةٌ</a:t>
@@ -39272,6 +39524,7 @@
                   <a:srgbClr val="1B3B6F"/>
                 </a:solidFill>
                 <a:latin typeface="Amiri" pitchFamily="2" charset="-78"/>
+                <a:ea typeface="Amiri" pitchFamily="2" charset="-78"/>
                 <a:cs typeface="Amiri" pitchFamily="2" charset="-78"/>
               </a:rPr>
               <a:t>قَرِيبٌ</a:t>
@@ -39537,6 +39790,7 @@
                   <a:srgbClr val="1B3B6F"/>
                 </a:solidFill>
                 <a:latin typeface="Amiri" pitchFamily="2" charset="-78"/>
+                <a:ea typeface="Amiri" pitchFamily="2" charset="-78"/>
                 <a:cs typeface="Amiri" pitchFamily="2" charset="-78"/>
               </a:rPr>
               <a:t>الأَكْبَرُ · الأَصْغَرُ</a:t>
@@ -39694,6 +39948,7 @@
                   <a:srgbClr val="1B3B6F"/>
                 </a:solidFill>
                 <a:latin typeface="Amiri" pitchFamily="2" charset="-78"/>
+                <a:ea typeface="Amiri" pitchFamily="2" charset="-78"/>
                 <a:cs typeface="Amiri" pitchFamily="2" charset="-78"/>
               </a:rPr>
               <a:t>الكُبْرَى · الصُّغْرَى</a:t>
@@ -39959,6 +40214,7 @@
                   <a:srgbClr val="1B3B6F"/>
                 </a:solidFill>
                 <a:latin typeface="Amiri" pitchFamily="2" charset="-78"/>
+                <a:ea typeface="Amiri" pitchFamily="2" charset="-78"/>
                 <a:cs typeface="Amiri" pitchFamily="2" charset="-78"/>
               </a:rPr>
               <a:t>أُسْرَةٌ</a:t>
@@ -40116,6 +40372,7 @@
                   <a:srgbClr val="1B3B6F"/>
                 </a:solidFill>
                 <a:latin typeface="Amiri" pitchFamily="2" charset="-78"/>
+                <a:ea typeface="Amiri" pitchFamily="2" charset="-78"/>
                 <a:cs typeface="Amiri" pitchFamily="2" charset="-78"/>
               </a:rPr>
               <a:t>أُسَرٌ</a:t>
@@ -40219,6 +40476,7 @@
                   <a:srgbClr val="1B3B6F"/>
                 </a:solidFill>
                 <a:latin typeface="Amiri" pitchFamily="2" charset="-78"/>
+                <a:ea typeface="Amiri" pitchFamily="2" charset="-78"/>
                 <a:cs typeface="Amiri" pitchFamily="2" charset="-78"/>
               </a:rPr>
               <a:t>أُسْرَتِي</a:t>
@@ -40352,6 +40610,7 @@
                   <a:srgbClr val="D4AF37"/>
                 </a:solidFill>
                 <a:latin typeface="Amiri" pitchFamily="2" charset="-78"/>
+                <a:ea typeface="Amiri" pitchFamily="2" charset="-78"/>
                 <a:cs typeface="Amiri" pitchFamily="2" charset="-78"/>
               </a:rPr>
               <a:t>م</a:t>
@@ -40672,6 +40931,7 @@
                   <a:srgbClr val="8A6D1E"/>
                 </a:solidFill>
                 <a:latin typeface="Amiri" pitchFamily="2" charset="-78"/>
+                <a:ea typeface="Amiri" pitchFamily="2" charset="-78"/>
                 <a:cs typeface="Amiri" pitchFamily="2" charset="-78"/>
               </a:rPr>
               <a:t>فِي الغُرَفِ</a:t>
@@ -41848,6 +42108,7 @@
                   <a:srgbClr val="1B3B6F"/>
                 </a:solidFill>
                 <a:latin typeface="Amiri" pitchFamily="2" charset="-78"/>
+                <a:ea typeface="Amiri" pitchFamily="2" charset="-78"/>
                 <a:cs typeface="Amiri" pitchFamily="2" charset="-78"/>
               </a:rPr>
               <a:t>دَوْرُكَ!</a:t>
@@ -41924,6 +42185,7 @@
                   <a:srgbClr val="1B3B6F"/>
                 </a:solidFill>
                 <a:latin typeface="Amiri" pitchFamily="2" charset="-78"/>
+                <a:ea typeface="Amiri" pitchFamily="2" charset="-78"/>
                 <a:cs typeface="Amiri" pitchFamily="2" charset="-78"/>
               </a:rPr>
               <a:t>أَحْسَنْتَ! / أَحْسَنْتِ!</a:t>
@@ -42000,6 +42262,7 @@
                   <a:srgbClr val="1B3B6F"/>
                 </a:solidFill>
                 <a:latin typeface="Amiri" pitchFamily="2" charset="-78"/>
+                <a:ea typeface="Amiri" pitchFamily="2" charset="-78"/>
                 <a:cs typeface="Amiri" pitchFamily="2" charset="-78"/>
               </a:rPr>
               <a:t>تَكَلَّمْ أَكْثَرَ، مِنْ فَضْلِكَ</a:t>
@@ -42076,6 +42339,7 @@
                   <a:srgbClr val="1B3B6F"/>
                 </a:solidFill>
                 <a:latin typeface="Amiri" pitchFamily="2" charset="-78"/>
+                <a:ea typeface="Amiri" pitchFamily="2" charset="-78"/>
                 <a:cs typeface="Amiri" pitchFamily="2" charset="-78"/>
               </a:rPr>
               <a:t>لِمَاذَا؟</a:t>
@@ -42247,6 +42511,7 @@
                   <a:srgbClr val="D4AF37"/>
                 </a:solidFill>
                 <a:latin typeface="Amiri" pitchFamily="2" charset="-78"/>
+                <a:ea typeface="Amiri" pitchFamily="2" charset="-78"/>
                 <a:cs typeface="Amiri" pitchFamily="2" charset="-78"/>
               </a:rPr>
               <a:t>م</a:t>
@@ -42567,6 +42832,7 @@
                   <a:srgbClr val="8A6D1E"/>
                 </a:solidFill>
                 <a:latin typeface="Amiri" pitchFamily="2" charset="-78"/>
+                <a:ea typeface="Amiri" pitchFamily="2" charset="-78"/>
                 <a:cs typeface="Amiri" pitchFamily="2" charset="-78"/>
               </a:rPr>
               <a:t>صُورَةُ العَائِلَةِ</a:t>
@@ -42847,6 +43113,7 @@
                   <a:srgbClr val="1B3B6F"/>
                 </a:solidFill>
                 <a:latin typeface="Amiri" pitchFamily="2" charset="-78"/>
+                <a:ea typeface="Amiri" pitchFamily="2" charset="-78"/>
                 <a:cs typeface="Amiri" pitchFamily="2" charset="-78"/>
               </a:rPr>
               <a:t>فِي أُسْرَتِي … أَشْخَاصٍ</a:t>
@@ -42923,6 +43190,7 @@
                   <a:srgbClr val="1B3B6F"/>
                 </a:solidFill>
                 <a:latin typeface="Amiri" pitchFamily="2" charset="-78"/>
+                <a:ea typeface="Amiri" pitchFamily="2" charset="-78"/>
                 <a:cs typeface="Amiri" pitchFamily="2" charset="-78"/>
               </a:rPr>
               <a:t>صُورَةٌ جَمِيلَةٌ! كَمْ شَخْصًا فِي أُسْرَتِكَ؟</a:t>
@@ -43091,6 +43359,7 @@
                   <a:srgbClr val="1B3B6F"/>
                 </a:solidFill>
                 <a:latin typeface="Amiri" pitchFamily="2" charset="-78"/>
+                <a:ea typeface="Amiri" pitchFamily="2" charset="-78"/>
                 <a:cs typeface="Amiri" pitchFamily="2" charset="-78"/>
               </a:rPr>
               <a:t>هٰذَا … وَهُوَ …</a:t>
@@ -43167,6 +43436,7 @@
                   <a:srgbClr val="1B3B6F"/>
                 </a:solidFill>
                 <a:latin typeface="Amiri" pitchFamily="2" charset="-78"/>
+                <a:ea typeface="Amiri" pitchFamily="2" charset="-78"/>
                 <a:cs typeface="Amiri" pitchFamily="2" charset="-78"/>
               </a:rPr>
               <a:t>مَنْ هٰذَا الرَّجُلُ؟</a:t>
@@ -43335,6 +43605,7 @@
                   <a:srgbClr val="1B3B6F"/>
                 </a:solidFill>
                 <a:latin typeface="Amiri" pitchFamily="2" charset="-78"/>
+                <a:ea typeface="Amiri" pitchFamily="2" charset="-78"/>
                 <a:cs typeface="Amiri" pitchFamily="2" charset="-78"/>
               </a:rPr>
               <a:t>هٰذِهِ … عُمْرُهَا …</a:t>
@@ -43411,6 +43682,7 @@
                   <a:srgbClr val="1B3B6F"/>
                 </a:solidFill>
                 <a:latin typeface="Amiri" pitchFamily="2" charset="-78"/>
+                <a:ea typeface="Amiri" pitchFamily="2" charset="-78"/>
                 <a:cs typeface="Amiri" pitchFamily="2" charset="-78"/>
               </a:rPr>
               <a:t>وَمَنْ هٰذِهِ البِنْتُ الصَّغِيرَةُ؟</a:t>
@@ -43579,6 +43851,7 @@
                   <a:srgbClr val="1B3B6F"/>
                 </a:solidFill>
                 <a:latin typeface="Amiri" pitchFamily="2" charset="-78"/>
+                <a:ea typeface="Amiri" pitchFamily="2" charset="-78"/>
                 <a:cs typeface="Amiri" pitchFamily="2" charset="-78"/>
               </a:rPr>
               <a:t>نَعَمْ، جَدِّي وَجَدَّتِي يَسْكُنَانِ فِي …</a:t>
@@ -43655,6 +43928,7 @@
                   <a:srgbClr val="1B3B6F"/>
                 </a:solidFill>
                 <a:latin typeface="Amiri" pitchFamily="2" charset="-78"/>
+                <a:ea typeface="Amiri" pitchFamily="2" charset="-78"/>
                 <a:cs typeface="Amiri" pitchFamily="2" charset="-78"/>
               </a:rPr>
               <a:t>هَلْ عِنْدَكَ أَجْدَادٌ؟</a:t>
@@ -43823,6 +44097,7 @@
                   <a:srgbClr val="1B3B6F"/>
                 </a:solidFill>
                 <a:latin typeface="Amiri" pitchFamily="2" charset="-78"/>
+                <a:ea typeface="Amiri" pitchFamily="2" charset="-78"/>
                 <a:cs typeface="Amiri" pitchFamily="2" charset="-78"/>
               </a:rPr>
               <a:t>أَخِي الأَكْبَرُ / أُمِّي … لِأَنَّ …</a:t>
@@ -43899,6 +44174,7 @@
                   <a:srgbClr val="1B3B6F"/>
                 </a:solidFill>
                 <a:latin typeface="Amiri" pitchFamily="2" charset="-78"/>
+                <a:ea typeface="Amiri" pitchFamily="2" charset="-78"/>
                 <a:cs typeface="Amiri" pitchFamily="2" charset="-78"/>
               </a:rPr>
               <a:t>مَنْ أَقْرَبُ شَخْصٍ إِلَيْكَ؟</a:t>
@@ -44173,6 +44449,7 @@
                   <a:srgbClr val="D4AF37"/>
                 </a:solidFill>
                 <a:latin typeface="Amiri" pitchFamily="2" charset="-78"/>
+                <a:ea typeface="Amiri" pitchFamily="2" charset="-78"/>
                 <a:cs typeface="Amiri" pitchFamily="2" charset="-78"/>
               </a:rPr>
               <a:t>م</a:t>
@@ -44493,6 +44770,7 @@
                   <a:srgbClr val="8A6D1E"/>
                 </a:solidFill>
                 <a:latin typeface="Amiri" pitchFamily="2" charset="-78"/>
+                <a:ea typeface="Amiri" pitchFamily="2" charset="-78"/>
                 <a:cs typeface="Amiri" pitchFamily="2" charset="-78"/>
               </a:rPr>
               <a:t>زِيَارَةُ الأَقَارِبِ</a:t>
@@ -44773,6 +45051,7 @@
                   <a:srgbClr val="1B3B6F"/>
                 </a:solidFill>
                 <a:latin typeface="Amiri" pitchFamily="2" charset="-78"/>
+                <a:ea typeface="Amiri" pitchFamily="2" charset="-78"/>
                 <a:cs typeface="Amiri" pitchFamily="2" charset="-78"/>
               </a:rPr>
               <a:t>سَنَزُورُكُمْ يَوْمَ …</a:t>
@@ -44849,6 +45128,7 @@
                   <a:srgbClr val="1B3B6F"/>
                 </a:solidFill>
                 <a:latin typeface="Amiri" pitchFamily="2" charset="-78"/>
+                <a:ea typeface="Amiri" pitchFamily="2" charset="-78"/>
                 <a:cs typeface="Amiri" pitchFamily="2" charset="-78"/>
               </a:rPr>
               <a:t>أَهْلًا يَا حَبِيبِي! مَتَى سَتَزُورُونَنَا؟</a:t>
@@ -45017,6 +45297,7 @@
                   <a:srgbClr val="1B3B6F"/>
                 </a:solidFill>
                 <a:latin typeface="Amiri" pitchFamily="2" charset="-78"/>
+                <a:ea typeface="Amiri" pitchFamily="2" charset="-78"/>
                 <a:cs typeface="Amiri" pitchFamily="2" charset="-78"/>
               </a:rPr>
               <a:t>سَيَأْتِي … وَ…</a:t>
@@ -45093,6 +45374,7 @@
                   <a:srgbClr val="1B3B6F"/>
                 </a:solidFill>
                 <a:latin typeface="Amiri" pitchFamily="2" charset="-78"/>
+                <a:ea typeface="Amiri" pitchFamily="2" charset="-78"/>
                 <a:cs typeface="Amiri" pitchFamily="2" charset="-78"/>
               </a:rPr>
               <a:t>مَنْ سَيَأْتِي مَعَكَ؟</a:t>
@@ -45261,6 +45543,7 @@
                   <a:srgbClr val="1B3B6F"/>
                 </a:solidFill>
                 <a:latin typeface="Amiri" pitchFamily="2" charset="-78"/>
+                <a:ea typeface="Amiri" pitchFamily="2" charset="-78"/>
                 <a:cs typeface="Amiri" pitchFamily="2" charset="-78"/>
               </a:rPr>
               <a:t>كَيْفَ حَالُ …؟</a:t>
@@ -45337,6 +45620,7 @@
                   <a:srgbClr val="1B3B6F"/>
                 </a:solidFill>
                 <a:latin typeface="Amiri" pitchFamily="2" charset="-78"/>
+                <a:ea typeface="Amiri" pitchFamily="2" charset="-78"/>
                 <a:cs typeface="Amiri" pitchFamily="2" charset="-78"/>
               </a:rPr>
               <a:t>أَوْلَادِي يَنْتَظِرُونَكَ!</a:t>
@@ -45440,6 +45724,7 @@
                   <a:srgbClr val="1B3B6F"/>
                 </a:solidFill>
                 <a:latin typeface="Amiri" pitchFamily="2" charset="-78"/>
+                <a:ea typeface="Amiri" pitchFamily="2" charset="-78"/>
                 <a:cs typeface="Amiri" pitchFamily="2" charset="-78"/>
               </a:rPr>
               <a:t>أُحِبُّ … الَّتِي تَطْبُخِينَهَا</a:t>
@@ -45516,6 +45801,7 @@
                   <a:srgbClr val="1B3B6F"/>
                 </a:solidFill>
                 <a:latin typeface="Amiri" pitchFamily="2" charset="-78"/>
+                <a:ea typeface="Amiri" pitchFamily="2" charset="-78"/>
                 <a:cs typeface="Amiri" pitchFamily="2" charset="-78"/>
               </a:rPr>
               <a:t>نَعَمْ! مَاذَا تُحِبُّ أَنْ تَأْكُلَ؟</a:t>
@@ -45619,6 +45905,7 @@
                   <a:srgbClr val="1B3B6F"/>
                 </a:solidFill>
                 <a:latin typeface="Amiri" pitchFamily="2" charset="-78"/>
+                <a:ea typeface="Amiri" pitchFamily="2" charset="-78"/>
                 <a:cs typeface="Amiri" pitchFamily="2" charset="-78"/>
               </a:rPr>
               <a:t>سَنَلْعَبُ … / سَنَخْرُجُ …</a:t>
@@ -45695,6 +45982,7 @@
                   <a:srgbClr val="1B3B6F"/>
                 </a:solidFill>
                 <a:latin typeface="Amiri" pitchFamily="2" charset="-78"/>
+                <a:ea typeface="Amiri" pitchFamily="2" charset="-78"/>
                 <a:cs typeface="Amiri" pitchFamily="2" charset="-78"/>
               </a:rPr>
               <a:t>مَاذَا سَتَفْعَلُونَ بَعْدَ الغَدَاءِ؟</a:t>
@@ -45869,13 +46157,9 @@
     <a:fontScheme name="Office">
       <a:majorFont>
         <a:latin typeface="Calibri Light" panose="020F0302020204030204"/>
-        <a:ea typeface=""/>
-        <a:cs typeface=""/>
-        <a:font script="Jpan" typeface="游ゴシック Light"/>
-        <a:font script="Hang" typeface="맑은 고딕"/>
-        <a:font script="Hans" typeface="等线 Light"/>
-        <a:font script="Hant" typeface="新細明體"/>
-        <a:font script="Arab" typeface="Times New Roman"/>
+        <a:ea typeface="Amiri" pitchFamily="2" charset="-78"/>
+        <a:cs typeface="Amiri" pitchFamily="2" charset="-78"/>
+        <a:font script="Arab" typeface="Amiri"/>
         <a:font script="Hebr" typeface="Times New Roman"/>
         <a:font script="Thai" typeface="Angsana New"/>
         <a:font script="Ethi" typeface="Nyala"/>
@@ -45921,13 +46205,9 @@
       </a:majorFont>
       <a:minorFont>
         <a:latin typeface="Calibri" panose="020F0502020204030204"/>
-        <a:ea typeface=""/>
-        <a:cs typeface=""/>
-        <a:font script="Jpan" typeface="游ゴシック"/>
-        <a:font script="Hang" typeface="맑은 고딕"/>
-        <a:font script="Hans" typeface="等线"/>
-        <a:font script="Hant" typeface="新細明體"/>
-        <a:font script="Arab" typeface="Arial"/>
+        <a:ea typeface="Amiri" pitchFamily="2" charset="-78"/>
+        <a:cs typeface="Amiri" pitchFamily="2" charset="-78"/>
+        <a:font script="Arab" typeface="Amiri"/>
         <a:font script="Hebr" typeface="Arial"/>
         <a:font script="Thai" typeface="Cordia New"/>
         <a:font script="Ethi" typeface="Nyala"/>
